--- a/index/designs/y8-l14/l6-furniture-shopping/l6-furniture-shopping.pptx
+++ b/index/designs/y8-l14/l6-furniture-shopping/l6-furniture-shopping.pptx
@@ -24,9 +24,11 @@
     <p:sldId id="272" r:id="rId18"/>
     <p:sldId id="273" r:id="rId19"/>
     <p:sldId id="274" r:id="rId20"/>
+    <p:sldId id="275" r:id="rId21"/>
+    <p:sldId id="276" r:id="rId22"/>
   </p:sldIdLst>
   <p:notesMasterIdLst>
-    <p:notesMasterId r:id="rId21"/>
+    <p:notesMasterId r:id="rId23"/>
   </p:notesMasterIdLst>
   <p:sldSz cx="12192000" cy="6858000"/>
   <p:notesSz cx="6858000" cy="12192000"/>
@@ -1512,6 +1514,182 @@
             <a:fld id="{F7021451-1387-4CA6-816F-3879F97B5CBC}" type="slidenum">
               <a:rPr lang="en-US"/>
               <a:t>2</a:t>
+            </a:fld>
+            <a:endParaRPr lang="en-US"/>
+          </a:p>
+        </p:txBody>
+      </p:sp>
+    </p:spTree>
+    <p:extLst>
+      <p:ext uri="{BB962C8B-B14F-4D97-AF65-F5344CB8AC3E}">
+        <p14:creationId xmlns:p14="http://schemas.microsoft.com/office/powerpoint/2010/main" val="1024086991"/>
+      </p:ext>
+    </p:extLst>
+  </p:cSld>
+  <p:clrMapOvr>
+    <a:masterClrMapping/>
+  </p:clrMapOvr>
+</p:notes>
+</file>
+
+<file path=ppt/notesSlides/notesSlide20.xml><?xml version="1.0" encoding="utf-8"?>
+<p:notes xmlns:a="http://schemas.openxmlformats.org/drawingml/2006/main" xmlns:r="http://schemas.openxmlformats.org/officeDocument/2006/relationships" xmlns:p="http://schemas.openxmlformats.org/presentationml/2006/main">
+  <p:cSld>
+    <p:spTree>
+      <p:nvGrpSpPr>
+        <p:cNvPr id="1" name=""/>
+        <p:cNvGrpSpPr/>
+        <p:nvPr/>
+      </p:nvGrpSpPr>
+      <p:grpSpPr>
+        <a:xfrm>
+          <a:off x="0" y="0"/>
+          <a:ext cx="0" cy="0"/>
+          <a:chOff x="0" y="0"/>
+          <a:chExt cx="0" cy="0"/>
+        </a:xfrm>
+      </p:grpSpPr>
+      <p:sp>
+        <p:nvSpPr>
+          <p:cNvPr id="2" name="Slide Image Placeholder 1"/>
+          <p:cNvSpPr>
+            <a:spLocks noGrp="1" noRot="1" noChangeAspect="1"/>
+          </p:cNvSpPr>
+          <p:nvPr>
+            <p:ph type="sldImg"/>
+          </p:nvPr>
+        </p:nvSpPr>
+        <p:spPr/>
+      </p:sp>
+      <p:sp>
+        <p:nvSpPr>
+          <p:cNvPr id="3" name="Notes Placeholder 2"/>
+          <p:cNvSpPr>
+            <a:spLocks noGrp="1"/>
+          </p:cNvSpPr>
+          <p:nvPr>
+            <p:ph type="body" idx="1"/>
+          </p:nvPr>
+        </p:nvSpPr>
+        <p:spPr/>
+        <p:txBody>
+          <a:bodyPr/>
+          <a:lstStyle/>
+          <a:p>
+            <a:r>
+              <a:rPr lang="en-US" dirty="0"/>
+              <a:t/>
+            </a:r>
+            <a:endParaRPr lang="en-US" dirty="0"/>
+          </a:p>
+        </p:txBody>
+      </p:sp>
+      <p:sp>
+        <p:nvSpPr>
+          <p:cNvPr id="4" name="Slide Number Placeholder 3"/>
+          <p:cNvSpPr>
+            <a:spLocks noGrp="1"/>
+          </p:cNvSpPr>
+          <p:nvPr>
+            <p:ph type="sldNum" sz="quarter" idx="10"/>
+          </p:nvPr>
+        </p:nvSpPr>
+        <p:spPr/>
+        <p:txBody>
+          <a:bodyPr/>
+          <a:lstStyle/>
+          <a:p>
+            <a:fld id="{F7021451-1387-4CA6-816F-3879F97B5CBC}" type="slidenum">
+              <a:rPr lang="en-US"/>
+              <a:t>20</a:t>
+            </a:fld>
+            <a:endParaRPr lang="en-US"/>
+          </a:p>
+        </p:txBody>
+      </p:sp>
+    </p:spTree>
+    <p:extLst>
+      <p:ext uri="{BB962C8B-B14F-4D97-AF65-F5344CB8AC3E}">
+        <p14:creationId xmlns:p14="http://schemas.microsoft.com/office/powerpoint/2010/main" val="1024086991"/>
+      </p:ext>
+    </p:extLst>
+  </p:cSld>
+  <p:clrMapOvr>
+    <a:masterClrMapping/>
+  </p:clrMapOvr>
+</p:notes>
+</file>
+
+<file path=ppt/notesSlides/notesSlide21.xml><?xml version="1.0" encoding="utf-8"?>
+<p:notes xmlns:a="http://schemas.openxmlformats.org/drawingml/2006/main" xmlns:r="http://schemas.openxmlformats.org/officeDocument/2006/relationships" xmlns:p="http://schemas.openxmlformats.org/presentationml/2006/main">
+  <p:cSld>
+    <p:spTree>
+      <p:nvGrpSpPr>
+        <p:cNvPr id="1" name=""/>
+        <p:cNvGrpSpPr/>
+        <p:nvPr/>
+      </p:nvGrpSpPr>
+      <p:grpSpPr>
+        <a:xfrm>
+          <a:off x="0" y="0"/>
+          <a:ext cx="0" cy="0"/>
+          <a:chOff x="0" y="0"/>
+          <a:chExt cx="0" cy="0"/>
+        </a:xfrm>
+      </p:grpSpPr>
+      <p:sp>
+        <p:nvSpPr>
+          <p:cNvPr id="2" name="Slide Image Placeholder 1"/>
+          <p:cNvSpPr>
+            <a:spLocks noGrp="1" noRot="1" noChangeAspect="1"/>
+          </p:cNvSpPr>
+          <p:nvPr>
+            <p:ph type="sldImg"/>
+          </p:nvPr>
+        </p:nvSpPr>
+        <p:spPr/>
+      </p:sp>
+      <p:sp>
+        <p:nvSpPr>
+          <p:cNvPr id="3" name="Notes Placeholder 2"/>
+          <p:cNvSpPr>
+            <a:spLocks noGrp="1"/>
+          </p:cNvSpPr>
+          <p:nvPr>
+            <p:ph type="body" idx="1"/>
+          </p:nvPr>
+        </p:nvSpPr>
+        <p:spPr/>
+        <p:txBody>
+          <a:bodyPr/>
+          <a:lstStyle/>
+          <a:p>
+            <a:r>
+              <a:rPr lang="en-US" dirty="0"/>
+              <a:t/>
+            </a:r>
+            <a:endParaRPr lang="en-US" dirty="0"/>
+          </a:p>
+        </p:txBody>
+      </p:sp>
+      <p:sp>
+        <p:nvSpPr>
+          <p:cNvPr id="4" name="Slide Number Placeholder 3"/>
+          <p:cNvSpPr>
+            <a:spLocks noGrp="1"/>
+          </p:cNvSpPr>
+          <p:nvPr>
+            <p:ph type="sldNum" sz="quarter" idx="10"/>
+          </p:nvPr>
+        </p:nvSpPr>
+        <p:spPr/>
+        <p:txBody>
+          <a:bodyPr/>
+          <a:lstStyle/>
+          <a:p>
+            <a:fld id="{F7021451-1387-4CA6-816F-3879F97B5CBC}" type="slidenum">
+              <a:rPr lang="en-US"/>
+              <a:t>21</a:t>
             </a:fld>
             <a:endParaRPr lang="en-US"/>
           </a:p>
@@ -2616,8 +2794,8 @@
         </p:nvSpPr>
         <p:spPr>
           <a:xfrm>
-            <a:off x="11315700" y="176213"/>
-            <a:ext cx="375717" cy="180975"/>
+            <a:off x="11316593" y="176213"/>
+            <a:ext cx="374806" cy="180975"/>
           </a:xfrm>
           <a:prstGeom prst="rect">
             <a:avLst/>
@@ -2641,7 +2819,7 @@
                 <a:ea typeface="Noto Sans" pitchFamily="34" charset="-122"/>
                 <a:cs typeface="Noto Sans" pitchFamily="34" charset="-120"/>
               </a:rPr>
-              <a:t>1 / 19</a:t>
+              <a:t>1 / 21</a:t>
             </a:r>
             <a:endParaRPr lang="en-US" sz="1000" dirty="0"/>
           </a:p>
@@ -3022,8 +3200,8 @@
         </p:nvSpPr>
         <p:spPr>
           <a:xfrm>
-            <a:off x="11233547" y="176213"/>
-            <a:ext cx="459513" cy="180975"/>
+            <a:off x="11234440" y="176213"/>
+            <a:ext cx="458602" cy="180975"/>
           </a:xfrm>
           <a:prstGeom prst="rect">
             <a:avLst/>
@@ -3047,7 +3225,7 @@
                 <a:ea typeface="Noto Sans" pitchFamily="34" charset="-122"/>
                 <a:cs typeface="Noto Sans" pitchFamily="34" charset="-120"/>
               </a:rPr>
-              <a:t>10 / 19</a:t>
+              <a:t>10 / 21</a:t>
             </a:r>
             <a:endParaRPr lang="en-US" sz="1000" dirty="0"/>
           </a:p>
@@ -3919,8 +4097,8 @@
         </p:nvSpPr>
         <p:spPr>
           <a:xfrm>
-            <a:off x="507950" y="176213"/>
-            <a:ext cx="2644893" cy="180975"/>
+            <a:off x="507950" y="180975"/>
+            <a:ext cx="2386370" cy="171450"/>
           </a:xfrm>
           <a:prstGeom prst="rect">
             <a:avLst/>
@@ -3958,8 +4136,8 @@
         </p:nvSpPr>
         <p:spPr>
           <a:xfrm>
-            <a:off x="3386435" y="166688"/>
-            <a:ext cx="1039710" cy="200025"/>
+            <a:off x="3132981" y="166688"/>
+            <a:ext cx="943466" cy="200025"/>
           </a:xfrm>
           <a:prstGeom prst="rect">
             <a:avLst/>
@@ -3983,7 +4161,7 @@
                 <a:ea typeface="Noto Sans" pitchFamily="34" charset="-122"/>
                 <a:cs typeface="Noto Sans" pitchFamily="34" charset="-120"/>
               </a:rPr>
-              <a:t>活动一 · 8 分钟</a:t>
+              <a:t>活动一 · 7 分钟</a:t>
             </a:r>
             <a:endParaRPr lang="en-US" sz="1100" dirty="0"/>
           </a:p>
@@ -3997,8 +4175,8 @@
         </p:nvSpPr>
         <p:spPr>
           <a:xfrm>
-            <a:off x="11257955" y="176213"/>
-            <a:ext cx="434617" cy="180975"/>
+            <a:off x="11244709" y="180975"/>
+            <a:ext cx="448127" cy="171450"/>
           </a:xfrm>
           <a:prstGeom prst="rect">
             <a:avLst/>
@@ -4022,7 +4200,7 @@
                 <a:ea typeface="Noto Sans" pitchFamily="34" charset="-122"/>
                 <a:cs typeface="Noto Sans" pitchFamily="34" charset="-120"/>
               </a:rPr>
-              <a:t>11 / 19</a:t>
+              <a:t>11 / 21</a:t>
             </a:r>
             <a:endParaRPr lang="en-US" sz="1000" dirty="0"/>
           </a:p>
@@ -4099,7 +4277,7 @@
       </p:sp>
       <p:pic>
         <p:nvPicPr>
-          <p:cNvPr id="9" name="Image 0" descr="/var/folders/6c/210dcgxn4gz5sm71vld2cy1h0000gn/T/tmp.emPkXuZ1Lq/img/jiajudian.png">    </p:cNvPr>
+          <p:cNvPr id="9" name="Image 0" descr="/var/folders/6c/210dcgxn4gz5sm71vld2cy1h0000gn/T/tmp.owmCEDjpXl/img/jiajudian.png">    </p:cNvPr>
           <p:cNvPicPr>
             <a:picLocks noChangeAspect="1"/>
           </p:cNvPicPr>
@@ -4549,8 +4727,8 @@
         </p:nvSpPr>
         <p:spPr>
           <a:xfrm>
-            <a:off x="11232803" y="176213"/>
-            <a:ext cx="460272" cy="180975"/>
+            <a:off x="11233696" y="176213"/>
+            <a:ext cx="459361" cy="180975"/>
           </a:xfrm>
           <a:prstGeom prst="rect">
             <a:avLst/>
@@ -4574,7 +4752,7 @@
                 <a:ea typeface="Noto Sans" pitchFamily="34" charset="-122"/>
                 <a:cs typeface="Noto Sans" pitchFamily="34" charset="-120"/>
               </a:rPr>
-              <a:t>12 / 19</a:t>
+              <a:t>12 / 21</a:t>
             </a:r>
             <a:endParaRPr lang="en-US" sz="1000" dirty="0"/>
           </a:p>
@@ -5079,7 +5257,7 @@
                 <a:ea typeface="Noto Sans" pitchFamily="34" charset="-122"/>
                 <a:cs typeface="Noto Sans" pitchFamily="34" charset="-120"/>
               </a:rPr>
-              <a:t>活动二 · 角色扮演 · 6 分钟</a:t>
+              <a:t>活动二 · 角色扮演 · 5 分钟</a:t>
             </a:r>
             <a:endParaRPr lang="en-US" sz="1100" dirty="0"/>
           </a:p>
@@ -5093,8 +5271,8 @@
         </p:nvSpPr>
         <p:spPr>
           <a:xfrm>
-            <a:off x="11233249" y="176213"/>
-            <a:ext cx="459816" cy="180975"/>
+            <a:off x="11234142" y="176213"/>
+            <a:ext cx="458906" cy="180975"/>
           </a:xfrm>
           <a:prstGeom prst="rect">
             <a:avLst/>
@@ -5118,7 +5296,7 @@
                 <a:ea typeface="Noto Sans" pitchFamily="34" charset="-122"/>
                 <a:cs typeface="Noto Sans" pitchFamily="34" charset="-120"/>
               </a:rPr>
-              <a:t>13 / 19</a:t>
+              <a:t>13 / 21</a:t>
             </a:r>
             <a:endParaRPr lang="en-US" sz="1000" dirty="0"/>
           </a:p>
@@ -5979,8 +6157,8 @@
         </p:nvSpPr>
         <p:spPr>
           <a:xfrm>
-            <a:off x="507950" y="180975"/>
-            <a:ext cx="2386370" cy="171450"/>
+            <a:off x="507950" y="176213"/>
+            <a:ext cx="2644893" cy="180975"/>
           </a:xfrm>
           <a:prstGeom prst="rect">
             <a:avLst/>
@@ -6018,8 +6196,8 @@
         </p:nvSpPr>
         <p:spPr>
           <a:xfrm>
-            <a:off x="3132981" y="166688"/>
-            <a:ext cx="1206392" cy="200025"/>
+            <a:off x="3386435" y="166688"/>
+            <a:ext cx="1296260" cy="200025"/>
           </a:xfrm>
           <a:prstGeom prst="rect">
             <a:avLst/>
@@ -6057,8 +6235,8 @@
         </p:nvSpPr>
         <p:spPr>
           <a:xfrm>
-            <a:off x="11244709" y="180975"/>
-            <a:ext cx="448127" cy="171450"/>
+            <a:off x="11233547" y="176213"/>
+            <a:ext cx="459513" cy="180975"/>
           </a:xfrm>
           <a:prstGeom prst="rect">
             <a:avLst/>
@@ -6082,7 +6260,7 @@
                 <a:ea typeface="Noto Sans" pitchFamily="34" charset="-122"/>
                 <a:cs typeface="Noto Sans" pitchFamily="34" charset="-120"/>
               </a:rPr>
-              <a:t>14 / 19</a:t>
+              <a:t>14 / 21</a:t>
             </a:r>
             <a:endParaRPr lang="en-US" sz="1000" dirty="0"/>
           </a:p>
@@ -6501,8 +6679,8 @@
         </p:nvSpPr>
         <p:spPr>
           <a:xfrm>
-            <a:off x="507950" y="176213"/>
-            <a:ext cx="2644893" cy="180975"/>
+            <a:off x="507950" y="180975"/>
+            <a:ext cx="2386370" cy="171450"/>
           </a:xfrm>
           <a:prstGeom prst="rect">
             <a:avLst/>
@@ -6540,8 +6718,8 @@
         </p:nvSpPr>
         <p:spPr>
           <a:xfrm>
-            <a:off x="3386435" y="166688"/>
-            <a:ext cx="2486257" cy="200025"/>
+            <a:off x="3132981" y="166688"/>
+            <a:ext cx="2219233" cy="200025"/>
           </a:xfrm>
           <a:prstGeom prst="rect">
             <a:avLst/>
@@ -6579,8 +6757,8 @@
         </p:nvSpPr>
         <p:spPr>
           <a:xfrm>
-            <a:off x="11232803" y="176213"/>
-            <a:ext cx="460272" cy="180975"/>
+            <a:off x="11244709" y="180975"/>
+            <a:ext cx="448127" cy="171450"/>
           </a:xfrm>
           <a:prstGeom prst="rect">
             <a:avLst/>
@@ -6604,7 +6782,7 @@
                 <a:ea typeface="Noto Sans" pitchFamily="34" charset="-122"/>
                 <a:cs typeface="Noto Sans" pitchFamily="34" charset="-120"/>
               </a:rPr>
-              <a:t>15 / 19</a:t>
+              <a:t>15 / 21</a:t>
             </a:r>
             <a:endParaRPr lang="en-US" sz="1000" dirty="0"/>
           </a:p>
@@ -7121,8 +7299,8 @@
         </p:nvSpPr>
         <p:spPr>
           <a:xfrm>
-            <a:off x="11232059" y="176213"/>
-            <a:ext cx="461031" cy="180975"/>
+            <a:off x="11232952" y="176213"/>
+            <a:ext cx="460120" cy="180975"/>
           </a:xfrm>
           <a:prstGeom prst="rect">
             <a:avLst/>
@@ -7146,7 +7324,7 @@
                 <a:ea typeface="Noto Sans" pitchFamily="34" charset="-122"/>
                 <a:cs typeface="Noto Sans" pitchFamily="34" charset="-120"/>
               </a:rPr>
-              <a:t>16 / 19</a:t>
+              <a:t>16 / 21</a:t>
             </a:r>
             <a:endParaRPr lang="en-US" sz="1000" dirty="0"/>
           </a:p>
@@ -7627,8 +7805,8 @@
         </p:nvSpPr>
         <p:spPr>
           <a:xfrm>
-            <a:off x="507950" y="180975"/>
-            <a:ext cx="2386370" cy="171450"/>
+            <a:off x="507950" y="176213"/>
+            <a:ext cx="2644893" cy="180975"/>
           </a:xfrm>
           <a:prstGeom prst="rect">
             <a:avLst/>
@@ -7666,8 +7844,8 @@
         </p:nvSpPr>
         <p:spPr>
           <a:xfrm>
-            <a:off x="3132981" y="166688"/>
-            <a:ext cx="1792358" cy="200025"/>
+            <a:off x="3386435" y="166688"/>
+            <a:ext cx="1874940" cy="200025"/>
           </a:xfrm>
           <a:prstGeom prst="rect">
             <a:avLst/>
@@ -7705,8 +7883,8 @@
         </p:nvSpPr>
         <p:spPr>
           <a:xfrm>
-            <a:off x="11244709" y="180975"/>
-            <a:ext cx="448127" cy="171450"/>
+            <a:off x="11239500" y="176213"/>
+            <a:ext cx="453441" cy="180975"/>
           </a:xfrm>
           <a:prstGeom prst="rect">
             <a:avLst/>
@@ -7730,7 +7908,7 @@
                 <a:ea typeface="Noto Sans" pitchFamily="34" charset="-122"/>
                 <a:cs typeface="Noto Sans" pitchFamily="34" charset="-120"/>
               </a:rPr>
-              <a:t>17 / 19</a:t>
+              <a:t>17 / 21</a:t>
             </a:r>
             <a:endParaRPr lang="en-US" sz="1000" dirty="0"/>
           </a:p>
@@ -7774,7 +7952,7 @@
         </p:nvSpPr>
         <p:spPr>
           <a:xfrm>
-            <a:off x="609600" y="916484"/>
+            <a:off x="609600" y="949821"/>
             <a:ext cx="11192256" cy="200025"/>
           </a:xfrm>
           <a:prstGeom prst="rect">
@@ -7813,12 +7991,12 @@
         </p:nvSpPr>
         <p:spPr>
           <a:xfrm>
-            <a:off x="609600" y="1116509"/>
-            <a:ext cx="10972800" cy="671215"/>
+            <a:off x="609600" y="1149846"/>
+            <a:ext cx="10972800" cy="661690"/>
           </a:xfrm>
           <a:prstGeom prst="roundRect">
             <a:avLst>
-              <a:gd name="adj" fmla="val 9460"/>
+              <a:gd name="adj" fmla="val 9597"/>
             </a:avLst>
           </a:prstGeom>
           <a:solidFill>
@@ -7849,7 +8027,7 @@
         </p:nvSpPr>
         <p:spPr>
           <a:xfrm>
-            <a:off x="796826" y="1164134"/>
+            <a:off x="796826" y="1197471"/>
             <a:ext cx="246075" cy="259110"/>
           </a:xfrm>
           <a:prstGeom prst="rect">
@@ -7891,8 +8069,8 @@
         </p:nvSpPr>
         <p:spPr>
           <a:xfrm>
-            <a:off x="1203127" y="1164134"/>
-            <a:ext cx="1813003" cy="248989"/>
+            <a:off x="1203127" y="1197471"/>
+            <a:ext cx="1847463" cy="248989"/>
           </a:xfrm>
           <a:prstGeom prst="rect">
             <a:avLst/>
@@ -7933,8 +8111,8 @@
         </p:nvSpPr>
         <p:spPr>
           <a:xfrm>
-            <a:off x="1203127" y="1463873"/>
-            <a:ext cx="1813003" cy="276225"/>
+            <a:off x="1203127" y="1497211"/>
+            <a:ext cx="1847463" cy="266700"/>
           </a:xfrm>
           <a:prstGeom prst="rect">
             <a:avLst/>
@@ -7975,12 +8153,12 @@
         </p:nvSpPr>
         <p:spPr>
           <a:xfrm>
-            <a:off x="609600" y="1813024"/>
-            <a:ext cx="10972800" cy="671215"/>
+            <a:off x="609600" y="1836837"/>
+            <a:ext cx="10972800" cy="661690"/>
           </a:xfrm>
           <a:prstGeom prst="roundRect">
             <a:avLst>
-              <a:gd name="adj" fmla="val 9460"/>
+              <a:gd name="adj" fmla="val 9597"/>
             </a:avLst>
           </a:prstGeom>
           <a:solidFill>
@@ -8011,7 +8189,7 @@
         </p:nvSpPr>
         <p:spPr>
           <a:xfrm>
-            <a:off x="796826" y="1860649"/>
+            <a:off x="796826" y="1884462"/>
             <a:ext cx="246075" cy="259110"/>
           </a:xfrm>
           <a:prstGeom prst="rect">
@@ -8053,8 +8231,8 @@
         </p:nvSpPr>
         <p:spPr>
           <a:xfrm>
-            <a:off x="1203127" y="1860649"/>
-            <a:ext cx="1631749" cy="248989"/>
+            <a:off x="1203127" y="1884462"/>
+            <a:ext cx="1662717" cy="248989"/>
           </a:xfrm>
           <a:prstGeom prst="rect">
             <a:avLst/>
@@ -8095,8 +8273,8 @@
         </p:nvSpPr>
         <p:spPr>
           <a:xfrm>
-            <a:off x="1203127" y="2160389"/>
-            <a:ext cx="1631749" cy="276225"/>
+            <a:off x="1203127" y="2184202"/>
+            <a:ext cx="1662717" cy="266700"/>
           </a:xfrm>
           <a:prstGeom prst="rect">
             <a:avLst/>
@@ -8137,12 +8315,12 @@
         </p:nvSpPr>
         <p:spPr>
           <a:xfrm>
-            <a:off x="609600" y="2509540"/>
-            <a:ext cx="10972800" cy="671215"/>
+            <a:off x="609600" y="2523827"/>
+            <a:ext cx="10972800" cy="661690"/>
           </a:xfrm>
           <a:prstGeom prst="roundRect">
             <a:avLst>
-              <a:gd name="adj" fmla="val 9460"/>
+              <a:gd name="adj" fmla="val 9597"/>
             </a:avLst>
           </a:prstGeom>
           <a:solidFill>
@@ -8173,7 +8351,7 @@
         </p:nvSpPr>
         <p:spPr>
           <a:xfrm>
-            <a:off x="796826" y="2557165"/>
+            <a:off x="796826" y="2571452"/>
             <a:ext cx="246075" cy="259110"/>
           </a:xfrm>
           <a:prstGeom prst="rect">
@@ -8215,8 +8393,8 @@
         </p:nvSpPr>
         <p:spPr>
           <a:xfrm>
-            <a:off x="1203127" y="2557165"/>
-            <a:ext cx="1846097" cy="248989"/>
+            <a:off x="1203127" y="2571452"/>
+            <a:ext cx="1845945" cy="248989"/>
           </a:xfrm>
           <a:prstGeom prst="rect">
             <a:avLst/>
@@ -8257,8 +8435,8 @@
         </p:nvSpPr>
         <p:spPr>
           <a:xfrm>
-            <a:off x="1203127" y="2856905"/>
-            <a:ext cx="1846097" cy="276225"/>
+            <a:off x="1203127" y="2871192"/>
+            <a:ext cx="1845945" cy="266700"/>
           </a:xfrm>
           <a:prstGeom prst="rect">
             <a:avLst/>
@@ -8299,12 +8477,12 @@
         </p:nvSpPr>
         <p:spPr>
           <a:xfrm>
-            <a:off x="609600" y="3206055"/>
-            <a:ext cx="10972800" cy="671215"/>
+            <a:off x="609600" y="3210818"/>
+            <a:ext cx="10972800" cy="661690"/>
           </a:xfrm>
           <a:prstGeom prst="roundRect">
             <a:avLst>
-              <a:gd name="adj" fmla="val 9460"/>
+              <a:gd name="adj" fmla="val 9597"/>
             </a:avLst>
           </a:prstGeom>
           <a:solidFill>
@@ -8335,7 +8513,7 @@
         </p:nvSpPr>
         <p:spPr>
           <a:xfrm>
-            <a:off x="796826" y="3253680"/>
+            <a:off x="796826" y="3258443"/>
             <a:ext cx="246075" cy="259110"/>
           </a:xfrm>
           <a:prstGeom prst="rect">
@@ -8377,8 +8555,8 @@
         </p:nvSpPr>
         <p:spPr>
           <a:xfrm>
-            <a:off x="1203127" y="3253680"/>
-            <a:ext cx="1631749" cy="248989"/>
+            <a:off x="1203127" y="3258443"/>
+            <a:ext cx="1662717" cy="248989"/>
           </a:xfrm>
           <a:prstGeom prst="rect">
             <a:avLst/>
@@ -8419,8 +8597,8 @@
         </p:nvSpPr>
         <p:spPr>
           <a:xfrm>
-            <a:off x="1203127" y="3553420"/>
-            <a:ext cx="1631749" cy="276225"/>
+            <a:off x="1203127" y="3558183"/>
+            <a:ext cx="1662717" cy="266700"/>
           </a:xfrm>
           <a:prstGeom prst="rect">
             <a:avLst/>
@@ -8461,12 +8639,12 @@
         </p:nvSpPr>
         <p:spPr>
           <a:xfrm>
-            <a:off x="609600" y="3902571"/>
-            <a:ext cx="10972800" cy="671215"/>
+            <a:off x="609600" y="3897809"/>
+            <a:ext cx="10972800" cy="661690"/>
           </a:xfrm>
           <a:prstGeom prst="roundRect">
             <a:avLst>
-              <a:gd name="adj" fmla="val 9460"/>
+              <a:gd name="adj" fmla="val 9597"/>
             </a:avLst>
           </a:prstGeom>
           <a:solidFill>
@@ -8497,7 +8675,7 @@
         </p:nvSpPr>
         <p:spPr>
           <a:xfrm>
-            <a:off x="796826" y="3950196"/>
+            <a:off x="796826" y="3945434"/>
             <a:ext cx="246075" cy="259110"/>
           </a:xfrm>
           <a:prstGeom prst="rect">
@@ -8539,8 +8717,8 @@
         </p:nvSpPr>
         <p:spPr>
           <a:xfrm>
-            <a:off x="1203127" y="3950196"/>
-            <a:ext cx="1994258" cy="248989"/>
+            <a:off x="1203127" y="3945434"/>
+            <a:ext cx="2032209" cy="248989"/>
           </a:xfrm>
           <a:prstGeom prst="rect">
             <a:avLst/>
@@ -8581,8 +8759,8 @@
         </p:nvSpPr>
         <p:spPr>
           <a:xfrm>
-            <a:off x="1203127" y="4249936"/>
-            <a:ext cx="1994258" cy="276225"/>
+            <a:off x="1203127" y="4245173"/>
+            <a:ext cx="2032209" cy="266700"/>
           </a:xfrm>
           <a:prstGeom prst="rect">
             <a:avLst/>
@@ -8623,12 +8801,12 @@
         </p:nvSpPr>
         <p:spPr>
           <a:xfrm>
-            <a:off x="609600" y="4599087"/>
-            <a:ext cx="10972800" cy="671215"/>
+            <a:off x="609600" y="4584799"/>
+            <a:ext cx="10972800" cy="661690"/>
           </a:xfrm>
           <a:prstGeom prst="roundRect">
             <a:avLst>
-              <a:gd name="adj" fmla="val 9460"/>
+              <a:gd name="adj" fmla="val 9597"/>
             </a:avLst>
           </a:prstGeom>
           <a:solidFill>
@@ -8659,7 +8837,7 @@
         </p:nvSpPr>
         <p:spPr>
           <a:xfrm>
-            <a:off x="796826" y="4646712"/>
+            <a:off x="796826" y="4632424"/>
             <a:ext cx="246075" cy="259110"/>
           </a:xfrm>
           <a:prstGeom prst="rect">
@@ -8701,8 +8879,8 @@
         </p:nvSpPr>
         <p:spPr>
           <a:xfrm>
-            <a:off x="1203127" y="4646712"/>
-            <a:ext cx="2175513" cy="248989"/>
+            <a:off x="1203127" y="4632424"/>
+            <a:ext cx="2216956" cy="248989"/>
           </a:xfrm>
           <a:prstGeom prst="rect">
             <a:avLst/>
@@ -8743,8 +8921,8 @@
         </p:nvSpPr>
         <p:spPr>
           <a:xfrm>
-            <a:off x="1203127" y="4946452"/>
-            <a:ext cx="2175513" cy="276225"/>
+            <a:off x="1203127" y="4932164"/>
+            <a:ext cx="2216956" cy="266700"/>
           </a:xfrm>
           <a:prstGeom prst="rect">
             <a:avLst/>
@@ -8785,12 +8963,12 @@
         </p:nvSpPr>
         <p:spPr>
           <a:xfrm>
-            <a:off x="609600" y="5295602"/>
-            <a:ext cx="10972800" cy="671215"/>
+            <a:off x="609600" y="5271790"/>
+            <a:ext cx="10972800" cy="661690"/>
           </a:xfrm>
           <a:prstGeom prst="roundRect">
             <a:avLst>
-              <a:gd name="adj" fmla="val 9460"/>
+              <a:gd name="adj" fmla="val 9597"/>
             </a:avLst>
           </a:prstGeom>
           <a:solidFill>
@@ -8821,7 +8999,7 @@
         </p:nvSpPr>
         <p:spPr>
           <a:xfrm>
-            <a:off x="796826" y="5343227"/>
+            <a:off x="796826" y="5319415"/>
             <a:ext cx="246075" cy="259110"/>
           </a:xfrm>
           <a:prstGeom prst="rect">
@@ -8863,8 +9041,8 @@
         </p:nvSpPr>
         <p:spPr>
           <a:xfrm>
-            <a:off x="1203127" y="5343227"/>
-            <a:ext cx="2356920" cy="248989"/>
+            <a:off x="1203127" y="5319415"/>
+            <a:ext cx="2401702" cy="248989"/>
           </a:xfrm>
           <a:prstGeom prst="rect">
             <a:avLst/>
@@ -8905,8 +9083,8 @@
         </p:nvSpPr>
         <p:spPr>
           <a:xfrm>
-            <a:off x="1203127" y="5642967"/>
-            <a:ext cx="2356920" cy="276225"/>
+            <a:off x="1203127" y="5619155"/>
+            <a:ext cx="2401702" cy="266700"/>
           </a:xfrm>
           <a:prstGeom prst="rect">
             <a:avLst/>
@@ -9032,8 +9210,8 @@
         </p:nvSpPr>
         <p:spPr>
           <a:xfrm>
-            <a:off x="507950" y="180975"/>
-            <a:ext cx="2386370" cy="171450"/>
+            <a:off x="507950" y="176213"/>
+            <a:ext cx="2644893" cy="180975"/>
           </a:xfrm>
           <a:prstGeom prst="rect">
             <a:avLst/>
@@ -9071,8 +9249,8 @@
         </p:nvSpPr>
         <p:spPr>
           <a:xfrm>
-            <a:off x="3132981" y="166688"/>
-            <a:ext cx="1768373" cy="200025"/>
+            <a:off x="3386435" y="166688"/>
+            <a:ext cx="2203597" cy="200025"/>
           </a:xfrm>
           <a:prstGeom prst="rect">
             <a:avLst/>
@@ -9096,7 +9274,7 @@
                 <a:ea typeface="Noto Sans" pitchFamily="34" charset="-122"/>
                 <a:cs typeface="Noto Sans" pitchFamily="34" charset="-120"/>
               </a:rPr>
-              <a:t>游戏 · 猜我要买什么 · 3 分钟</a:t>
+              <a:t>游戏 · 第一步 · 90 秒 · 先认清楚</a:t>
             </a:r>
             <a:endParaRPr lang="en-US" sz="1100" dirty="0"/>
           </a:p>
@@ -9110,8 +9288,8 @@
         </p:nvSpPr>
         <p:spPr>
           <a:xfrm>
-            <a:off x="11244709" y="180975"/>
-            <a:ext cx="448127" cy="171450"/>
+            <a:off x="11233398" y="176213"/>
+            <a:ext cx="459665" cy="180975"/>
           </a:xfrm>
           <a:prstGeom prst="rect">
             <a:avLst/>
@@ -9135,7 +9313,7 @@
                 <a:ea typeface="Noto Sans" pitchFamily="34" charset="-122"/>
                 <a:cs typeface="Noto Sans" pitchFamily="34" charset="-120"/>
               </a:rPr>
-              <a:t>18 / 19</a:t>
+              <a:t>18 / 21</a:t>
             </a:r>
             <a:endParaRPr lang="en-US" sz="1000" dirty="0"/>
           </a:p>
@@ -9179,7 +9357,7 @@
         </p:nvSpPr>
         <p:spPr>
           <a:xfrm>
-            <a:off x="609600" y="1395413"/>
+            <a:off x="609600" y="1302395"/>
             <a:ext cx="11192256" cy="200025"/>
           </a:xfrm>
           <a:prstGeom prst="rect">
@@ -9204,7 +9382,7 @@
                 <a:ea typeface="Noto Sans" pitchFamily="34" charset="-122"/>
                 <a:cs typeface="Noto Sans" pitchFamily="34" charset="-120"/>
               </a:rPr>
-              <a:t>游戏 · 从总览页挑一样，让全班猜</a:t>
+              <a:t>独体字 · 这个单元课本教的八个 · UNIT 5'S SIMPLE CHARACTERS</a:t>
             </a:r>
             <a:endParaRPr lang="en-US" sz="1100" dirty="0"/>
           </a:p>
@@ -9218,18 +9396,18 @@
         </p:nvSpPr>
         <p:spPr>
           <a:xfrm>
-            <a:off x="609600" y="1595438"/>
-            <a:ext cx="10972800" cy="833438"/>
+            <a:off x="609600" y="1603921"/>
+            <a:ext cx="2628900" cy="1721793"/>
           </a:xfrm>
           <a:prstGeom prst="roundRect">
             <a:avLst>
-              <a:gd name="adj" fmla="val 7619"/>
+              <a:gd name="adj" fmla="val 3688"/>
             </a:avLst>
           </a:prstGeom>
           <a:solidFill>
             <a:srgbClr val="E6EAEB"/>
           </a:solidFill>
-          <a:ln w="9525">
+          <a:ln w="19050">
             <a:solidFill>
               <a:srgbClr val="D5DBDD"/>
             </a:solidFill>
@@ -9254,37 +9432,37 @@
         </p:nvSpPr>
         <p:spPr>
           <a:xfrm>
-            <a:off x="796826" y="1706463"/>
-            <a:ext cx="246075" cy="289471"/>
-          </a:xfrm>
-          <a:prstGeom prst="rect">
-            <a:avLst/>
-          </a:prstGeom>
-          <a:noFill/>
-          <a:ln/>
-        </p:spPr>
-        <p:txBody>
-          <a:bodyPr wrap="square" lIns="0" tIns="0" rIns="0" bIns="0" rtlCol="0" anchor="t"/>
-          <a:lstStyle/>
-          <a:p>
-            <a:pPr algn="l" indent="0" marL="0">
+            <a:off x="680466" y="1762571"/>
+            <a:ext cx="2487168" cy="575965"/>
+          </a:xfrm>
+          <a:prstGeom prst="rect">
+            <a:avLst/>
+          </a:prstGeom>
+          <a:noFill/>
+          <a:ln/>
+        </p:spPr>
+        <p:txBody>
+          <a:bodyPr wrap="square" lIns="0" tIns="0" rIns="0" bIns="0" rtlCol="0" anchor="t"/>
+          <a:lstStyle/>
+          <a:p>
+            <a:pPr algn="ctr" indent="0" marL="0">
               <a:lnSpc>
-                <a:spcPts val="2280"/>
+                <a:spcPts val="4536"/>
               </a:lnSpc>
               <a:buNone/>
             </a:pPr>
             <a:r>
-              <a:rPr lang="en-US" sz="1900" b="1" dirty="0">
-                <a:solidFill>
-                  <a:srgbClr val="B05B3B"/>
+              <a:rPr lang="en-US" sz="4200" b="1" dirty="0">
+                <a:solidFill>
+                  <a:srgbClr val="262B30"/>
                 </a:solidFill>
                 <a:latin typeface="Noto Serif SC" pitchFamily="34" charset="0"/>
                 <a:ea typeface="Noto Serif SC" pitchFamily="34" charset="-122"/>
                 <a:cs typeface="Noto Serif SC" pitchFamily="34" charset="-120"/>
               </a:rPr>
-              <a:t>1</a:t>
-            </a:r>
-            <a:endParaRPr lang="en-US" sz="1900" dirty="0"/>
+              <a:t>光</a:t>
+            </a:r>
+            <a:endParaRPr lang="en-US" sz="4200" dirty="0"/>
           </a:p>
         </p:txBody>
       </p:sp>
@@ -9296,37 +9474,37 @@
         </p:nvSpPr>
         <p:spPr>
           <a:xfrm>
-            <a:off x="1203127" y="1706463"/>
-            <a:ext cx="3108960" cy="284411"/>
-          </a:xfrm>
-          <a:prstGeom prst="rect">
-            <a:avLst/>
-          </a:prstGeom>
-          <a:noFill/>
-          <a:ln/>
-        </p:spPr>
-        <p:txBody>
-          <a:bodyPr wrap="square" lIns="0" tIns="0" rIns="0" bIns="0" rtlCol="0" anchor="t"/>
-          <a:lstStyle/>
-          <a:p>
-            <a:pPr algn="l" indent="0" marL="0">
-              <a:lnSpc>
-                <a:spcPts val="2240"/>
-              </a:lnSpc>
-              <a:buNone/>
-            </a:pPr>
-            <a:r>
-              <a:rPr lang="en-US" sz="1600" dirty="0">
-                <a:solidFill>
-                  <a:srgbClr val="262B30"/>
+            <a:off x="680466" y="2389287"/>
+            <a:ext cx="2487168" cy="266700"/>
+          </a:xfrm>
+          <a:prstGeom prst="rect">
+            <a:avLst/>
+          </a:prstGeom>
+          <a:noFill/>
+          <a:ln/>
+        </p:spPr>
+        <p:txBody>
+          <a:bodyPr wrap="square" lIns="0" tIns="0" rIns="0" bIns="0" rtlCol="0" anchor="t"/>
+          <a:lstStyle/>
+          <a:p>
+            <a:pPr algn="ctr" indent="0" marL="0">
+              <a:spcBef>
+                <a:spcPts val="400"/>
+              </a:spcBef>
+              <a:buNone/>
+            </a:pPr>
+            <a:r>
+              <a:rPr lang="en-US" sz="1500" b="1" dirty="0">
+                <a:solidFill>
+                  <a:srgbClr val="3D5A73"/>
                 </a:solidFill>
                 <a:latin typeface="Noto Sans" pitchFamily="34" charset="0"/>
                 <a:ea typeface="Noto Sans" pitchFamily="34" charset="-122"/>
                 <a:cs typeface="Noto Sans" pitchFamily="34" charset="-120"/>
               </a:rPr>
-              <a:t>一个同学心里挑一样，不说出来</a:t>
-            </a:r>
-            <a:endParaRPr lang="en-US" sz="1600" dirty="0"/>
+              <a:t>guāng</a:t>
+            </a:r>
+            <a:endParaRPr lang="en-US" sz="1500" dirty="0"/>
           </a:p>
         </p:txBody>
       </p:sp>
@@ -9338,37 +9516,37 @@
         </p:nvSpPr>
         <p:spPr>
           <a:xfrm>
-            <a:off x="1203127" y="2041624"/>
-            <a:ext cx="3108960" cy="276225"/>
-          </a:xfrm>
-          <a:prstGeom prst="rect">
-            <a:avLst/>
-          </a:prstGeom>
-          <a:noFill/>
-          <a:ln/>
-        </p:spPr>
-        <p:txBody>
-          <a:bodyPr wrap="square" lIns="0" tIns="0" rIns="0" bIns="0" rtlCol="0" anchor="t"/>
-          <a:lstStyle/>
-          <a:p>
-            <a:pPr algn="l" indent="0" marL="0">
+            <a:off x="680466" y="2668637"/>
+            <a:ext cx="2487168" cy="247650"/>
+          </a:xfrm>
+          <a:prstGeom prst="rect">
+            <a:avLst/>
+          </a:prstGeom>
+          <a:noFill/>
+          <a:ln/>
+        </p:spPr>
+        <p:txBody>
+          <a:bodyPr wrap="square" lIns="0" tIns="0" rIns="0" bIns="0" rtlCol="0" anchor="t"/>
+          <a:lstStyle/>
+          <a:p>
+            <a:pPr algn="ctr" indent="0" marL="0">
               <a:spcBef>
-                <a:spcPts val="400"/>
+                <a:spcPts val="100"/>
               </a:spcBef>
               <a:buNone/>
             </a:pPr>
             <a:r>
-              <a:rPr lang="en-US" sz="1500" b="1" dirty="0">
-                <a:solidFill>
-                  <a:srgbClr val="3D5A73"/>
-                </a:solidFill>
-                <a:latin typeface="Noto Serif SC" pitchFamily="34" charset="0"/>
-                <a:ea typeface="Noto Serif SC" pitchFamily="34" charset="-122"/>
-                <a:cs typeface="Noto Serif SC" pitchFamily="34" charset="-120"/>
-              </a:rPr>
-              <a:t>全班提问，只能用中文，最多二十个</a:t>
-            </a:r>
-            <a:endParaRPr lang="en-US" sz="1500" dirty="0"/>
+              <a:rPr lang="en-US" sz="1400" dirty="0">
+                <a:solidFill>
+                  <a:srgbClr val="4B545C"/>
+                </a:solidFill>
+                <a:latin typeface="Noto Sans" pitchFamily="34" charset="0"/>
+                <a:ea typeface="Noto Sans" pitchFamily="34" charset="-122"/>
+                <a:cs typeface="Noto Sans" pitchFamily="34" charset="-120"/>
+              </a:rPr>
+              <a:t>light</a:t>
+            </a:r>
+            <a:endParaRPr lang="en-US" sz="1400" dirty="0"/>
           </a:p>
         </p:txBody>
       </p:sp>
@@ -9380,18 +9558,60 @@
         </p:nvSpPr>
         <p:spPr>
           <a:xfrm>
-            <a:off x="609600" y="2505075"/>
-            <a:ext cx="10972800" cy="833438"/>
+            <a:off x="680466" y="2979688"/>
+            <a:ext cx="2487168" cy="200025"/>
+          </a:xfrm>
+          <a:prstGeom prst="rect">
+            <a:avLst/>
+          </a:prstGeom>
+          <a:noFill/>
+          <a:ln/>
+        </p:spPr>
+        <p:txBody>
+          <a:bodyPr wrap="square" lIns="0" tIns="0" rIns="0" bIns="0" rtlCol="0" anchor="t"/>
+          <a:lstStyle/>
+          <a:p>
+            <a:pPr algn="ctr" indent="0" marL="0">
+              <a:spcBef>
+                <a:spcPts val="500"/>
+              </a:spcBef>
+              <a:buNone/>
+            </a:pPr>
+            <a:r>
+              <a:rPr lang="en-US" sz="1100" dirty="0">
+                <a:solidFill>
+                  <a:srgbClr val="6E7780"/>
+                </a:solidFill>
+                <a:latin typeface="Noto Sans" pitchFamily="34" charset="0"/>
+                <a:ea typeface="Noto Sans" pitchFamily="34" charset="-122"/>
+                <a:cs typeface="Noto Sans" pitchFamily="34" charset="-120"/>
+              </a:rPr>
+              <a:t>第十三课 p.126</a:t>
+            </a:r>
+            <a:endParaRPr lang="en-US" sz="1100" dirty="0"/>
+          </a:p>
+        </p:txBody>
+      </p:sp>
+      <p:sp>
+        <p:nvSpPr>
+          <p:cNvPr id="14" name="Text 12"/>
+          <p:cNvSpPr/>
+          <p:nvPr/>
+        </p:nvSpPr>
+        <p:spPr>
+          <a:xfrm>
+            <a:off x="3390900" y="1603921"/>
+            <a:ext cx="2628900" cy="1721793"/>
           </a:xfrm>
           <a:prstGeom prst="roundRect">
             <a:avLst>
-              <a:gd name="adj" fmla="val 7619"/>
+              <a:gd name="adj" fmla="val 3688"/>
             </a:avLst>
           </a:prstGeom>
           <a:solidFill>
             <a:srgbClr val="E6EAEB"/>
           </a:solidFill>
-          <a:ln w="9525">
+          <a:ln w="19050">
             <a:solidFill>
               <a:srgbClr val="D5DBDD"/>
             </a:solidFill>
@@ -9410,150 +9630,192 @@
       </p:sp>
       <p:sp>
         <p:nvSpPr>
-          <p:cNvPr id="14" name="Text 12"/>
-          <p:cNvSpPr/>
-          <p:nvPr/>
-        </p:nvSpPr>
-        <p:spPr>
-          <a:xfrm>
-            <a:off x="796826" y="2616101"/>
-            <a:ext cx="246075" cy="289471"/>
-          </a:xfrm>
-          <a:prstGeom prst="rect">
-            <a:avLst/>
-          </a:prstGeom>
-          <a:noFill/>
-          <a:ln/>
-        </p:spPr>
-        <p:txBody>
-          <a:bodyPr wrap="square" lIns="0" tIns="0" rIns="0" bIns="0" rtlCol="0" anchor="t"/>
-          <a:lstStyle/>
-          <a:p>
-            <a:pPr algn="l" indent="0" marL="0">
+          <p:cNvPr id="15" name="Text 13"/>
+          <p:cNvSpPr/>
+          <p:nvPr/>
+        </p:nvSpPr>
+        <p:spPr>
+          <a:xfrm>
+            <a:off x="3461766" y="1762571"/>
+            <a:ext cx="2487168" cy="575965"/>
+          </a:xfrm>
+          <a:prstGeom prst="rect">
+            <a:avLst/>
+          </a:prstGeom>
+          <a:noFill/>
+          <a:ln/>
+        </p:spPr>
+        <p:txBody>
+          <a:bodyPr wrap="square" lIns="0" tIns="0" rIns="0" bIns="0" rtlCol="0" anchor="t"/>
+          <a:lstStyle/>
+          <a:p>
+            <a:pPr algn="ctr" indent="0" marL="0">
               <a:lnSpc>
-                <a:spcPts val="2280"/>
+                <a:spcPts val="4536"/>
               </a:lnSpc>
               <a:buNone/>
             </a:pPr>
             <a:r>
-              <a:rPr lang="en-US" sz="1900" b="1" dirty="0">
-                <a:solidFill>
-                  <a:srgbClr val="B05B3B"/>
+              <a:rPr lang="en-US" sz="4200" b="1" dirty="0">
+                <a:solidFill>
+                  <a:srgbClr val="262B30"/>
                 </a:solidFill>
                 <a:latin typeface="Noto Serif SC" pitchFamily="34" charset="0"/>
                 <a:ea typeface="Noto Serif SC" pitchFamily="34" charset="-122"/>
                 <a:cs typeface="Noto Serif SC" pitchFamily="34" charset="-120"/>
               </a:rPr>
-              <a:t>2</a:t>
-            </a:r>
-            <a:endParaRPr lang="en-US" sz="1900" dirty="0"/>
-          </a:p>
-        </p:txBody>
-      </p:sp>
-      <p:sp>
-        <p:nvSpPr>
-          <p:cNvPr id="15" name="Text 13"/>
-          <p:cNvSpPr/>
-          <p:nvPr/>
-        </p:nvSpPr>
-        <p:spPr>
-          <a:xfrm>
-            <a:off x="1203127" y="2616101"/>
-            <a:ext cx="4144723" cy="284411"/>
-          </a:xfrm>
-          <a:prstGeom prst="rect">
-            <a:avLst/>
-          </a:prstGeom>
-          <a:noFill/>
-          <a:ln/>
-        </p:spPr>
-        <p:txBody>
-          <a:bodyPr wrap="square" lIns="0" tIns="0" rIns="0" bIns="0" rtlCol="0" anchor="t"/>
-          <a:lstStyle/>
-          <a:p>
-            <a:pPr algn="l" indent="0" marL="0">
-              <a:lnSpc>
-                <a:spcPts val="2240"/>
-              </a:lnSpc>
-              <a:buNone/>
-            </a:pPr>
-            <a:r>
-              <a:rPr lang="en-US" sz="1600" dirty="0">
-                <a:solidFill>
-                  <a:srgbClr val="262B30"/>
+              <a:t>金</a:t>
+            </a:r>
+            <a:endParaRPr lang="en-US" sz="4200" dirty="0"/>
+          </a:p>
+        </p:txBody>
+      </p:sp>
+      <p:sp>
+        <p:nvSpPr>
+          <p:cNvPr id="16" name="Text 14"/>
+          <p:cNvSpPr/>
+          <p:nvPr/>
+        </p:nvSpPr>
+        <p:spPr>
+          <a:xfrm>
+            <a:off x="3461766" y="2389287"/>
+            <a:ext cx="2487168" cy="266700"/>
+          </a:xfrm>
+          <a:prstGeom prst="rect">
+            <a:avLst/>
+          </a:prstGeom>
+          <a:noFill/>
+          <a:ln/>
+        </p:spPr>
+        <p:txBody>
+          <a:bodyPr wrap="square" lIns="0" tIns="0" rIns="0" bIns="0" rtlCol="0" anchor="t"/>
+          <a:lstStyle/>
+          <a:p>
+            <a:pPr algn="ctr" indent="0" marL="0">
+              <a:spcBef>
+                <a:spcPts val="400"/>
+              </a:spcBef>
+              <a:buNone/>
+            </a:pPr>
+            <a:r>
+              <a:rPr lang="en-US" sz="1500" b="1" dirty="0">
+                <a:solidFill>
+                  <a:srgbClr val="3D5A73"/>
                 </a:solidFill>
                 <a:latin typeface="Noto Sans" pitchFamily="34" charset="0"/>
                 <a:ea typeface="Noto Sans" pitchFamily="34" charset="-122"/>
                 <a:cs typeface="Noto Sans" pitchFamily="34" charset="-120"/>
               </a:rPr>
-              <a:t>是不是厨房的东西？　有没有门？　大不大？</a:t>
-            </a:r>
-            <a:endParaRPr lang="en-US" sz="1600" dirty="0"/>
-          </a:p>
-        </p:txBody>
-      </p:sp>
-      <p:sp>
-        <p:nvSpPr>
-          <p:cNvPr id="16" name="Text 14"/>
-          <p:cNvSpPr/>
-          <p:nvPr/>
-        </p:nvSpPr>
-        <p:spPr>
-          <a:xfrm>
-            <a:off x="1203127" y="2951262"/>
-            <a:ext cx="4144723" cy="276225"/>
-          </a:xfrm>
-          <a:prstGeom prst="rect">
-            <a:avLst/>
-          </a:prstGeom>
-          <a:noFill/>
-          <a:ln/>
-        </p:spPr>
-        <p:txBody>
-          <a:bodyPr wrap="square" lIns="0" tIns="0" rIns="0" bIns="0" rtlCol="0" anchor="t"/>
-          <a:lstStyle/>
-          <a:p>
-            <a:pPr algn="l" indent="0" marL="0">
+              <a:t>jīn</a:t>
+            </a:r>
+            <a:endParaRPr lang="en-US" sz="1500" dirty="0"/>
+          </a:p>
+        </p:txBody>
+      </p:sp>
+      <p:sp>
+        <p:nvSpPr>
+          <p:cNvPr id="17" name="Text 15"/>
+          <p:cNvSpPr/>
+          <p:nvPr/>
+        </p:nvSpPr>
+        <p:spPr>
+          <a:xfrm>
+            <a:off x="3461766" y="2668637"/>
+            <a:ext cx="2487168" cy="247650"/>
+          </a:xfrm>
+          <a:prstGeom prst="rect">
+            <a:avLst/>
+          </a:prstGeom>
+          <a:noFill/>
+          <a:ln/>
+        </p:spPr>
+        <p:txBody>
+          <a:bodyPr wrap="square" lIns="0" tIns="0" rIns="0" bIns="0" rtlCol="0" anchor="t"/>
+          <a:lstStyle/>
+          <a:p>
+            <a:pPr algn="ctr" indent="0" marL="0">
               <a:spcBef>
-                <a:spcPts val="400"/>
+                <a:spcPts val="100"/>
               </a:spcBef>
               <a:buNone/>
             </a:pPr>
             <a:r>
-              <a:rPr lang="en-US" sz="1500" b="1" dirty="0">
-                <a:solidFill>
-                  <a:srgbClr val="3D5A73"/>
-                </a:solidFill>
-                <a:latin typeface="Noto Serif SC" pitchFamily="34" charset="0"/>
-                <a:ea typeface="Noto Serif SC" pitchFamily="34" charset="-122"/>
-                <a:cs typeface="Noto Serif SC" pitchFamily="34" charset="-120"/>
-              </a:rPr>
-              <a:t>猜中换人，玩两三轮</a:t>
-            </a:r>
-            <a:endParaRPr lang="en-US" sz="1500" dirty="0"/>
-          </a:p>
-        </p:txBody>
-      </p:sp>
-      <p:sp>
-        <p:nvSpPr>
-          <p:cNvPr id="17" name="Text 15"/>
-          <p:cNvSpPr/>
-          <p:nvPr/>
-        </p:nvSpPr>
-        <p:spPr>
-          <a:xfrm>
-            <a:off x="609600" y="3414713"/>
-            <a:ext cx="10972800" cy="833438"/>
+              <a:rPr lang="en-US" sz="1400" dirty="0">
+                <a:solidFill>
+                  <a:srgbClr val="4B545C"/>
+                </a:solidFill>
+                <a:latin typeface="Noto Sans" pitchFamily="34" charset="0"/>
+                <a:ea typeface="Noto Sans" pitchFamily="34" charset="-122"/>
+                <a:cs typeface="Noto Sans" pitchFamily="34" charset="-120"/>
+              </a:rPr>
+              <a:t>gold</a:t>
+            </a:r>
+            <a:endParaRPr lang="en-US" sz="1400" dirty="0"/>
+          </a:p>
+        </p:txBody>
+      </p:sp>
+      <p:sp>
+        <p:nvSpPr>
+          <p:cNvPr id="18" name="Text 16"/>
+          <p:cNvSpPr/>
+          <p:nvPr/>
+        </p:nvSpPr>
+        <p:spPr>
+          <a:xfrm>
+            <a:off x="3461766" y="2979688"/>
+            <a:ext cx="2487168" cy="200025"/>
+          </a:xfrm>
+          <a:prstGeom prst="rect">
+            <a:avLst/>
+          </a:prstGeom>
+          <a:noFill/>
+          <a:ln/>
+        </p:spPr>
+        <p:txBody>
+          <a:bodyPr wrap="square" lIns="0" tIns="0" rIns="0" bIns="0" rtlCol="0" anchor="t"/>
+          <a:lstStyle/>
+          <a:p>
+            <a:pPr algn="ctr" indent="0" marL="0">
+              <a:spcBef>
+                <a:spcPts val="500"/>
+              </a:spcBef>
+              <a:buNone/>
+            </a:pPr>
+            <a:r>
+              <a:rPr lang="en-US" sz="1100" dirty="0">
+                <a:solidFill>
+                  <a:srgbClr val="6E7780"/>
+                </a:solidFill>
+                <a:latin typeface="Noto Sans" pitchFamily="34" charset="0"/>
+                <a:ea typeface="Noto Sans" pitchFamily="34" charset="-122"/>
+                <a:cs typeface="Noto Sans" pitchFamily="34" charset="-120"/>
+              </a:rPr>
+              <a:t>第十三课 p.126</a:t>
+            </a:r>
+            <a:endParaRPr lang="en-US" sz="1100" dirty="0"/>
+          </a:p>
+        </p:txBody>
+      </p:sp>
+      <p:sp>
+        <p:nvSpPr>
+          <p:cNvPr id="19" name="Text 17"/>
+          <p:cNvSpPr/>
+          <p:nvPr/>
+        </p:nvSpPr>
+        <p:spPr>
+          <a:xfrm>
+            <a:off x="6172200" y="1603921"/>
+            <a:ext cx="2628900" cy="1721793"/>
           </a:xfrm>
           <a:prstGeom prst="roundRect">
             <a:avLst>
-              <a:gd name="adj" fmla="val 7619"/>
+              <a:gd name="adj" fmla="val 3688"/>
             </a:avLst>
           </a:prstGeom>
           <a:solidFill>
             <a:srgbClr val="E6EAEB"/>
           </a:solidFill>
-          <a:ln w="9525">
+          <a:ln w="19050">
             <a:solidFill>
               <a:srgbClr val="D5DBDD"/>
             </a:solidFill>
@@ -9572,172 +9834,192 @@
       </p:sp>
       <p:sp>
         <p:nvSpPr>
-          <p:cNvPr id="18" name="Text 16"/>
-          <p:cNvSpPr/>
-          <p:nvPr/>
-        </p:nvSpPr>
-        <p:spPr>
-          <a:xfrm>
-            <a:off x="796826" y="3525738"/>
-            <a:ext cx="246075" cy="289471"/>
-          </a:xfrm>
-          <a:prstGeom prst="rect">
-            <a:avLst/>
-          </a:prstGeom>
-          <a:noFill/>
-          <a:ln/>
-        </p:spPr>
-        <p:txBody>
-          <a:bodyPr wrap="square" lIns="0" tIns="0" rIns="0" bIns="0" rtlCol="0" anchor="t"/>
-          <a:lstStyle/>
-          <a:p>
-            <a:pPr algn="l" indent="0" marL="0">
+          <p:cNvPr id="20" name="Text 18"/>
+          <p:cNvSpPr/>
+          <p:nvPr/>
+        </p:nvSpPr>
+        <p:spPr>
+          <a:xfrm>
+            <a:off x="6243066" y="1762571"/>
+            <a:ext cx="2487168" cy="575965"/>
+          </a:xfrm>
+          <a:prstGeom prst="rect">
+            <a:avLst/>
+          </a:prstGeom>
+          <a:noFill/>
+          <a:ln/>
+        </p:spPr>
+        <p:txBody>
+          <a:bodyPr wrap="square" lIns="0" tIns="0" rIns="0" bIns="0" rtlCol="0" anchor="t"/>
+          <a:lstStyle/>
+          <a:p>
+            <a:pPr algn="ctr" indent="0" marL="0">
               <a:lnSpc>
-                <a:spcPts val="2280"/>
+                <a:spcPts val="4536"/>
               </a:lnSpc>
               <a:buNone/>
             </a:pPr>
             <a:r>
-              <a:rPr lang="en-US" sz="1900" b="1" dirty="0">
-                <a:solidFill>
-                  <a:srgbClr val="B05B3B"/>
+              <a:rPr lang="en-US" sz="4200" b="1" dirty="0">
+                <a:solidFill>
+                  <a:srgbClr val="262B30"/>
                 </a:solidFill>
                 <a:latin typeface="Noto Serif SC" pitchFamily="34" charset="0"/>
                 <a:ea typeface="Noto Serif SC" pitchFamily="34" charset="-122"/>
                 <a:cs typeface="Noto Serif SC" pitchFamily="34" charset="-120"/>
               </a:rPr>
-              <a:t>3</a:t>
-            </a:r>
-            <a:endParaRPr lang="en-US" sz="1900" dirty="0"/>
-          </a:p>
-        </p:txBody>
-      </p:sp>
-      <p:sp>
-        <p:nvSpPr>
-          <p:cNvPr id="19" name="Text 17"/>
-          <p:cNvSpPr/>
-          <p:nvPr/>
-        </p:nvSpPr>
-        <p:spPr>
-          <a:xfrm>
-            <a:off x="1203127" y="3525738"/>
-            <a:ext cx="4352089" cy="284411"/>
-          </a:xfrm>
-          <a:prstGeom prst="rect">
-            <a:avLst/>
-          </a:prstGeom>
-          <a:noFill/>
-          <a:ln/>
-        </p:spPr>
-        <p:txBody>
-          <a:bodyPr wrap="square" lIns="0" tIns="0" rIns="0" bIns="0" rtlCol="0" anchor="t"/>
-          <a:lstStyle/>
-          <a:p>
-            <a:pPr algn="l" indent="0" marL="0">
-              <a:lnSpc>
-                <a:spcPts val="2240"/>
-              </a:lnSpc>
-              <a:buNone/>
-            </a:pPr>
-            <a:r>
-              <a:rPr lang="en-US" sz="1600" b="1" dirty="0">
-                <a:solidFill>
-                  <a:srgbClr val="262B30"/>
+              <a:t>匕</a:t>
+            </a:r>
+            <a:endParaRPr lang="en-US" sz="4200" dirty="0"/>
+          </a:p>
+        </p:txBody>
+      </p:sp>
+      <p:sp>
+        <p:nvSpPr>
+          <p:cNvPr id="21" name="Text 19"/>
+          <p:cNvSpPr/>
+          <p:nvPr/>
+        </p:nvSpPr>
+        <p:spPr>
+          <a:xfrm>
+            <a:off x="6243066" y="2389287"/>
+            <a:ext cx="2487168" cy="266700"/>
+          </a:xfrm>
+          <a:prstGeom prst="rect">
+            <a:avLst/>
+          </a:prstGeom>
+          <a:noFill/>
+          <a:ln/>
+        </p:spPr>
+        <p:txBody>
+          <a:bodyPr wrap="square" lIns="0" tIns="0" rIns="0" bIns="0" rtlCol="0" anchor="t"/>
+          <a:lstStyle/>
+          <a:p>
+            <a:pPr algn="ctr" indent="0" marL="0">
+              <a:spcBef>
+                <a:spcPts val="400"/>
+              </a:spcBef>
+              <a:buNone/>
+            </a:pPr>
+            <a:r>
+              <a:rPr lang="en-US" sz="1500" b="1" dirty="0">
+                <a:solidFill>
+                  <a:srgbClr val="3D5A73"/>
                 </a:solidFill>
                 <a:latin typeface="Noto Sans" pitchFamily="34" charset="0"/>
                 <a:ea typeface="Noto Sans" pitchFamily="34" charset="-122"/>
                 <a:cs typeface="Noto Sans" pitchFamily="34" charset="-120"/>
               </a:rPr>
-              <a:t>加难</a:t>
-            </a:r>
-            <a:r>
-              <a:rPr lang="en-US" sz="1600" dirty="0">
-                <a:solidFill>
-                  <a:srgbClr val="262B30"/>
+              <a:t>bǐ</a:t>
+            </a:r>
+            <a:endParaRPr lang="en-US" sz="1500" dirty="0"/>
+          </a:p>
+        </p:txBody>
+      </p:sp>
+      <p:sp>
+        <p:nvSpPr>
+          <p:cNvPr id="22" name="Text 20"/>
+          <p:cNvSpPr/>
+          <p:nvPr/>
+        </p:nvSpPr>
+        <p:spPr>
+          <a:xfrm>
+            <a:off x="6243066" y="2668637"/>
+            <a:ext cx="2487168" cy="247650"/>
+          </a:xfrm>
+          <a:prstGeom prst="rect">
+            <a:avLst/>
+          </a:prstGeom>
+          <a:noFill/>
+          <a:ln/>
+        </p:spPr>
+        <p:txBody>
+          <a:bodyPr wrap="square" lIns="0" tIns="0" rIns="0" bIns="0" rtlCol="0" anchor="t"/>
+          <a:lstStyle/>
+          <a:p>
+            <a:pPr algn="ctr" indent="0" marL="0">
+              <a:spcBef>
+                <a:spcPts val="100"/>
+              </a:spcBef>
+              <a:buNone/>
+            </a:pPr>
+            <a:r>
+              <a:rPr lang="en-US" sz="1400" dirty="0">
+                <a:solidFill>
+                  <a:srgbClr val="4B545C"/>
                 </a:solidFill>
                 <a:latin typeface="Noto Sans" pitchFamily="34" charset="0"/>
                 <a:ea typeface="Noto Sans" pitchFamily="34" charset="-122"/>
                 <a:cs typeface="Noto Sans" pitchFamily="34" charset="-120"/>
               </a:rPr>
-              <a:t>：回答的人</a:t>
-            </a:r>
-            <a:r>
-              <a:rPr lang="en-US" sz="1600" b="1" dirty="0">
-                <a:solidFill>
-                  <a:srgbClr val="262B30"/>
+              <a:t>dagger</a:t>
+            </a:r>
+            <a:endParaRPr lang="en-US" sz="1400" dirty="0"/>
+          </a:p>
+        </p:txBody>
+      </p:sp>
+      <p:sp>
+        <p:nvSpPr>
+          <p:cNvPr id="23" name="Text 21"/>
+          <p:cNvSpPr/>
+          <p:nvPr/>
+        </p:nvSpPr>
+        <p:spPr>
+          <a:xfrm>
+            <a:off x="6243066" y="2979688"/>
+            <a:ext cx="2487168" cy="200025"/>
+          </a:xfrm>
+          <a:prstGeom prst="rect">
+            <a:avLst/>
+          </a:prstGeom>
+          <a:noFill/>
+          <a:ln/>
+        </p:spPr>
+        <p:txBody>
+          <a:bodyPr wrap="square" lIns="0" tIns="0" rIns="0" bIns="0" rtlCol="0" anchor="t"/>
+          <a:lstStyle/>
+          <a:p>
+            <a:pPr algn="ctr" indent="0" marL="0">
+              <a:spcBef>
+                <a:spcPts val="500"/>
+              </a:spcBef>
+              <a:buNone/>
+            </a:pPr>
+            <a:r>
+              <a:rPr lang="en-US" sz="1100" dirty="0">
+                <a:solidFill>
+                  <a:srgbClr val="6E7780"/>
                 </a:solidFill>
                 <a:latin typeface="Noto Sans" pitchFamily="34" charset="0"/>
                 <a:ea typeface="Noto Sans" pitchFamily="34" charset="-122"/>
                 <a:cs typeface="Noto Sans" pitchFamily="34" charset="-120"/>
               </a:rPr>
-              <a:t>不能说「是」也不能说「不是」</a:t>
-            </a:r>
-            <a:endParaRPr lang="en-US" sz="1600" dirty="0"/>
-          </a:p>
-        </p:txBody>
-      </p:sp>
-      <p:sp>
-        <p:nvSpPr>
-          <p:cNvPr id="20" name="Text 18"/>
-          <p:cNvSpPr/>
-          <p:nvPr/>
-        </p:nvSpPr>
-        <p:spPr>
-          <a:xfrm>
-            <a:off x="1203127" y="3860899"/>
-            <a:ext cx="4352089" cy="276225"/>
-          </a:xfrm>
-          <a:prstGeom prst="rect">
-            <a:avLst/>
-          </a:prstGeom>
-          <a:noFill/>
-          <a:ln/>
-        </p:spPr>
-        <p:txBody>
-          <a:bodyPr wrap="square" lIns="0" tIns="0" rIns="0" bIns="0" rtlCol="0" anchor="t"/>
-          <a:lstStyle/>
-          <a:p>
-            <a:pPr algn="l" indent="0" marL="0">
-              <a:spcBef>
-                <a:spcPts val="400"/>
-              </a:spcBef>
-              <a:buNone/>
-            </a:pPr>
-            <a:r>
-              <a:rPr lang="en-US" sz="1500" b="1" dirty="0">
-                <a:solidFill>
-                  <a:srgbClr val="3D5A73"/>
-                </a:solidFill>
-                <a:latin typeface="Noto Serif SC" pitchFamily="34" charset="0"/>
-                <a:ea typeface="Noto Serif SC" pitchFamily="34" charset="-122"/>
-                <a:cs typeface="Noto Serif SC" pitchFamily="34" charset="-120"/>
-              </a:rPr>
-              <a:t>每次都要说一整句，给一点消息</a:t>
-            </a:r>
-            <a:endParaRPr lang="en-US" sz="1500" dirty="0"/>
-          </a:p>
-        </p:txBody>
-      </p:sp>
-      <p:sp>
-        <p:nvSpPr>
-          <p:cNvPr id="21" name="Text 19"/>
-          <p:cNvSpPr/>
-          <p:nvPr/>
-        </p:nvSpPr>
-        <p:spPr>
-          <a:xfrm>
-            <a:off x="609600" y="4324350"/>
-            <a:ext cx="10972800" cy="833438"/>
+              <a:t>第十三课 p.126</a:t>
+            </a:r>
+            <a:endParaRPr lang="en-US" sz="1100" dirty="0"/>
+          </a:p>
+        </p:txBody>
+      </p:sp>
+      <p:sp>
+        <p:nvSpPr>
+          <p:cNvPr id="24" name="Text 22"/>
+          <p:cNvSpPr/>
+          <p:nvPr/>
+        </p:nvSpPr>
+        <p:spPr>
+          <a:xfrm>
+            <a:off x="8953500" y="1603921"/>
+            <a:ext cx="2628900" cy="1721793"/>
           </a:xfrm>
           <a:prstGeom prst="roundRect">
             <a:avLst>
-              <a:gd name="adj" fmla="val 7619"/>
+              <a:gd name="adj" fmla="val 3688"/>
             </a:avLst>
           </a:prstGeom>
           <a:solidFill>
             <a:srgbClr val="E6EAEB"/>
           </a:solidFill>
-          <a:ln w="9525">
+          <a:ln w="19050">
             <a:solidFill>
               <a:srgbClr val="D5DBDD"/>
             </a:solidFill>
@@ -9756,110 +10038,272 @@
       </p:sp>
       <p:sp>
         <p:nvSpPr>
-          <p:cNvPr id="22" name="Text 20"/>
-          <p:cNvSpPr/>
-          <p:nvPr/>
-        </p:nvSpPr>
-        <p:spPr>
-          <a:xfrm>
-            <a:off x="796826" y="4435376"/>
-            <a:ext cx="246075" cy="289471"/>
-          </a:xfrm>
-          <a:prstGeom prst="rect">
-            <a:avLst/>
-          </a:prstGeom>
-          <a:noFill/>
-          <a:ln/>
-        </p:spPr>
-        <p:txBody>
-          <a:bodyPr wrap="square" lIns="0" tIns="0" rIns="0" bIns="0" rtlCol="0" anchor="t"/>
-          <a:lstStyle/>
-          <a:p>
-            <a:pPr algn="l" indent="0" marL="0">
+          <p:cNvPr id="25" name="Text 23"/>
+          <p:cNvSpPr/>
+          <p:nvPr/>
+        </p:nvSpPr>
+        <p:spPr>
+          <a:xfrm>
+            <a:off x="9024366" y="1762571"/>
+            <a:ext cx="2487168" cy="575965"/>
+          </a:xfrm>
+          <a:prstGeom prst="rect">
+            <a:avLst/>
+          </a:prstGeom>
+          <a:noFill/>
+          <a:ln/>
+        </p:spPr>
+        <p:txBody>
+          <a:bodyPr wrap="square" lIns="0" tIns="0" rIns="0" bIns="0" rtlCol="0" anchor="t"/>
+          <a:lstStyle/>
+          <a:p>
+            <a:pPr algn="ctr" indent="0" marL="0">
               <a:lnSpc>
-                <a:spcPts val="2280"/>
+                <a:spcPts val="4536"/>
               </a:lnSpc>
               <a:buNone/>
             </a:pPr>
             <a:r>
-              <a:rPr lang="en-US" sz="1900" b="1" dirty="0">
-                <a:solidFill>
-                  <a:srgbClr val="B05B3B"/>
+              <a:rPr lang="en-US" sz="4200" b="1" dirty="0">
+                <a:solidFill>
+                  <a:srgbClr val="262B30"/>
                 </a:solidFill>
                 <a:latin typeface="Noto Serif SC" pitchFamily="34" charset="0"/>
                 <a:ea typeface="Noto Serif SC" pitchFamily="34" charset="-122"/>
                 <a:cs typeface="Noto Serif SC" pitchFamily="34" charset="-120"/>
               </a:rPr>
-              <a:t>4</a:t>
-            </a:r>
-            <a:endParaRPr lang="en-US" sz="1900" dirty="0"/>
-          </a:p>
-        </p:txBody>
-      </p:sp>
-      <p:sp>
-        <p:nvSpPr>
-          <p:cNvPr id="23" name="Text 21"/>
-          <p:cNvSpPr/>
-          <p:nvPr/>
-        </p:nvSpPr>
-        <p:spPr>
-          <a:xfrm>
-            <a:off x="1203127" y="4435376"/>
-            <a:ext cx="2914650" cy="284411"/>
-          </a:xfrm>
-          <a:prstGeom prst="rect">
-            <a:avLst/>
-          </a:prstGeom>
-          <a:noFill/>
-          <a:ln/>
-        </p:spPr>
-        <p:txBody>
-          <a:bodyPr wrap="square" lIns="0" tIns="0" rIns="0" bIns="0" rtlCol="0" anchor="t"/>
-          <a:lstStyle/>
-          <a:p>
-            <a:pPr algn="l" indent="0" marL="0">
-              <a:lnSpc>
-                <a:spcPts val="2240"/>
-              </a:lnSpc>
-              <a:buNone/>
-            </a:pPr>
-            <a:r>
-              <a:rPr lang="en-US" sz="1600" dirty="0">
-                <a:solidFill>
-                  <a:srgbClr val="262B30"/>
+              <a:t>入</a:t>
+            </a:r>
+            <a:endParaRPr lang="en-US" sz="4200" dirty="0"/>
+          </a:p>
+        </p:txBody>
+      </p:sp>
+      <p:sp>
+        <p:nvSpPr>
+          <p:cNvPr id="26" name="Text 24"/>
+          <p:cNvSpPr/>
+          <p:nvPr/>
+        </p:nvSpPr>
+        <p:spPr>
+          <a:xfrm>
+            <a:off x="9024366" y="2389287"/>
+            <a:ext cx="2487168" cy="266700"/>
+          </a:xfrm>
+          <a:prstGeom prst="rect">
+            <a:avLst/>
+          </a:prstGeom>
+          <a:noFill/>
+          <a:ln/>
+        </p:spPr>
+        <p:txBody>
+          <a:bodyPr wrap="square" lIns="0" tIns="0" rIns="0" bIns="0" rtlCol="0" anchor="t"/>
+          <a:lstStyle/>
+          <a:p>
+            <a:pPr algn="ctr" indent="0" marL="0">
+              <a:spcBef>
+                <a:spcPts val="400"/>
+              </a:spcBef>
+              <a:buNone/>
+            </a:pPr>
+            <a:r>
+              <a:rPr lang="en-US" sz="1500" b="1" dirty="0">
+                <a:solidFill>
+                  <a:srgbClr val="3D5A73"/>
                 </a:solidFill>
                 <a:latin typeface="Noto Sans" pitchFamily="34" charset="0"/>
                 <a:ea typeface="Noto Sans" pitchFamily="34" charset="-122"/>
                 <a:cs typeface="Noto Sans" pitchFamily="34" charset="-120"/>
               </a:rPr>
-              <a:t>而且提问只能用「V 不 V」</a:t>
-            </a:r>
-            <a:endParaRPr lang="en-US" sz="1600" dirty="0"/>
-          </a:p>
-        </p:txBody>
-      </p:sp>
-      <p:sp>
-        <p:nvSpPr>
-          <p:cNvPr id="24" name="Text 22"/>
-          <p:cNvSpPr/>
-          <p:nvPr/>
-        </p:nvSpPr>
-        <p:spPr>
-          <a:xfrm>
-            <a:off x="1203127" y="4770537"/>
-            <a:ext cx="2914650" cy="276225"/>
-          </a:xfrm>
-          <a:prstGeom prst="rect">
-            <a:avLst/>
-          </a:prstGeom>
-          <a:noFill/>
-          <a:ln/>
-        </p:spPr>
-        <p:txBody>
-          <a:bodyPr wrap="square" lIns="0" tIns="0" rIns="0" bIns="0" rtlCol="0" anchor="t"/>
-          <a:lstStyle/>
-          <a:p>
-            <a:pPr algn="l" indent="0" marL="0">
+              <a:t>rù</a:t>
+            </a:r>
+            <a:endParaRPr lang="en-US" sz="1500" dirty="0"/>
+          </a:p>
+        </p:txBody>
+      </p:sp>
+      <p:sp>
+        <p:nvSpPr>
+          <p:cNvPr id="27" name="Text 25"/>
+          <p:cNvSpPr/>
+          <p:nvPr/>
+        </p:nvSpPr>
+        <p:spPr>
+          <a:xfrm>
+            <a:off x="9024366" y="2668637"/>
+            <a:ext cx="2487168" cy="247650"/>
+          </a:xfrm>
+          <a:prstGeom prst="rect">
+            <a:avLst/>
+          </a:prstGeom>
+          <a:noFill/>
+          <a:ln/>
+        </p:spPr>
+        <p:txBody>
+          <a:bodyPr wrap="square" lIns="0" tIns="0" rIns="0" bIns="0" rtlCol="0" anchor="t"/>
+          <a:lstStyle/>
+          <a:p>
+            <a:pPr algn="ctr" indent="0" marL="0">
+              <a:spcBef>
+                <a:spcPts val="100"/>
+              </a:spcBef>
+              <a:buNone/>
+            </a:pPr>
+            <a:r>
+              <a:rPr lang="en-US" sz="1400" dirty="0">
+                <a:solidFill>
+                  <a:srgbClr val="4B545C"/>
+                </a:solidFill>
+                <a:latin typeface="Noto Sans" pitchFamily="34" charset="0"/>
+                <a:ea typeface="Noto Sans" pitchFamily="34" charset="-122"/>
+                <a:cs typeface="Noto Sans" pitchFamily="34" charset="-120"/>
+              </a:rPr>
+              <a:t>enter</a:t>
+            </a:r>
+            <a:endParaRPr lang="en-US" sz="1400" dirty="0"/>
+          </a:p>
+        </p:txBody>
+      </p:sp>
+      <p:sp>
+        <p:nvSpPr>
+          <p:cNvPr id="28" name="Text 26"/>
+          <p:cNvSpPr/>
+          <p:nvPr/>
+        </p:nvSpPr>
+        <p:spPr>
+          <a:xfrm>
+            <a:off x="9024366" y="2979688"/>
+            <a:ext cx="2487168" cy="200025"/>
+          </a:xfrm>
+          <a:prstGeom prst="rect">
+            <a:avLst/>
+          </a:prstGeom>
+          <a:noFill/>
+          <a:ln/>
+        </p:spPr>
+        <p:txBody>
+          <a:bodyPr wrap="square" lIns="0" tIns="0" rIns="0" bIns="0" rtlCol="0" anchor="t"/>
+          <a:lstStyle/>
+          <a:p>
+            <a:pPr algn="ctr" indent="0" marL="0">
+              <a:spcBef>
+                <a:spcPts val="500"/>
+              </a:spcBef>
+              <a:buNone/>
+            </a:pPr>
+            <a:r>
+              <a:rPr lang="en-US" sz="1100" dirty="0">
+                <a:solidFill>
+                  <a:srgbClr val="6E7780"/>
+                </a:solidFill>
+                <a:latin typeface="Noto Sans" pitchFamily="34" charset="0"/>
+                <a:ea typeface="Noto Sans" pitchFamily="34" charset="-122"/>
+                <a:cs typeface="Noto Sans" pitchFamily="34" charset="-120"/>
+              </a:rPr>
+              <a:t>第十三课 p.126</a:t>
+            </a:r>
+            <a:endParaRPr lang="en-US" sz="1100" dirty="0"/>
+          </a:p>
+        </p:txBody>
+      </p:sp>
+      <p:sp>
+        <p:nvSpPr>
+          <p:cNvPr id="29" name="Text 27"/>
+          <p:cNvSpPr/>
+          <p:nvPr/>
+        </p:nvSpPr>
+        <p:spPr>
+          <a:xfrm>
+            <a:off x="609600" y="3478113"/>
+            <a:ext cx="2628900" cy="1721793"/>
+          </a:xfrm>
+          <a:prstGeom prst="roundRect">
+            <a:avLst>
+              <a:gd name="adj" fmla="val 3688"/>
+            </a:avLst>
+          </a:prstGeom>
+          <a:solidFill>
+            <a:srgbClr val="E6EAEB"/>
+          </a:solidFill>
+          <a:ln w="19050">
+            <a:solidFill>
+              <a:srgbClr val="D5DBDD"/>
+            </a:solidFill>
+          </a:ln>
+        </p:spPr>
+        <p:txBody>
+          <a:bodyPr wrap="square" rtlCol="0" anchor="ctr"/>
+          <a:lstStyle/>
+          <a:p>
+            <a:pPr indent="0" marL="0">
+              <a:buNone/>
+            </a:pPr>
+            <a:endParaRPr lang="en-US" dirty="0"/>
+          </a:p>
+        </p:txBody>
+      </p:sp>
+      <p:sp>
+        <p:nvSpPr>
+          <p:cNvPr id="30" name="Text 28"/>
+          <p:cNvSpPr/>
+          <p:nvPr/>
+        </p:nvSpPr>
+        <p:spPr>
+          <a:xfrm>
+            <a:off x="680466" y="3636764"/>
+            <a:ext cx="2487168" cy="575965"/>
+          </a:xfrm>
+          <a:prstGeom prst="rect">
+            <a:avLst/>
+          </a:prstGeom>
+          <a:noFill/>
+          <a:ln/>
+        </p:spPr>
+        <p:txBody>
+          <a:bodyPr wrap="square" lIns="0" tIns="0" rIns="0" bIns="0" rtlCol="0" anchor="t"/>
+          <a:lstStyle/>
+          <a:p>
+            <a:pPr algn="ctr" indent="0" marL="0">
+              <a:lnSpc>
+                <a:spcPts val="4536"/>
+              </a:lnSpc>
+              <a:buNone/>
+            </a:pPr>
+            <a:r>
+              <a:rPr lang="en-US" sz="4200" b="1" dirty="0">
+                <a:solidFill>
+                  <a:srgbClr val="262B30"/>
+                </a:solidFill>
+                <a:latin typeface="Noto Serif SC" pitchFamily="34" charset="0"/>
+                <a:ea typeface="Noto Serif SC" pitchFamily="34" charset="-122"/>
+                <a:cs typeface="Noto Serif SC" pitchFamily="34" charset="-120"/>
+              </a:rPr>
+              <a:t>井</a:t>
+            </a:r>
+            <a:endParaRPr lang="en-US" sz="4200" dirty="0"/>
+          </a:p>
+        </p:txBody>
+      </p:sp>
+      <p:sp>
+        <p:nvSpPr>
+          <p:cNvPr id="31" name="Text 29"/>
+          <p:cNvSpPr/>
+          <p:nvPr/>
+        </p:nvSpPr>
+        <p:spPr>
+          <a:xfrm>
+            <a:off x="680466" y="4263479"/>
+            <a:ext cx="2487168" cy="266700"/>
+          </a:xfrm>
+          <a:prstGeom prst="rect">
+            <a:avLst/>
+          </a:prstGeom>
+          <a:noFill/>
+          <a:ln/>
+        </p:spPr>
+        <p:txBody>
+          <a:bodyPr wrap="square" lIns="0" tIns="0" rIns="0" bIns="0" rtlCol="0" anchor="t"/>
+          <a:lstStyle/>
+          <a:p>
+            <a:pPr algn="ctr" indent="0" marL="0">
               <a:spcBef>
                 <a:spcPts val="400"/>
               </a:spcBef>
@@ -9870,11 +10314,215 @@
                 <a:solidFill>
                   <a:srgbClr val="3D5A73"/>
                 </a:solidFill>
+                <a:latin typeface="Noto Sans" pitchFamily="34" charset="0"/>
+                <a:ea typeface="Noto Sans" pitchFamily="34" charset="-122"/>
+                <a:cs typeface="Noto Sans" pitchFamily="34" charset="-120"/>
+              </a:rPr>
+              <a:t>jǐng</a:t>
+            </a:r>
+            <a:endParaRPr lang="en-US" sz="1500" dirty="0"/>
+          </a:p>
+        </p:txBody>
+      </p:sp>
+      <p:sp>
+        <p:nvSpPr>
+          <p:cNvPr id="32" name="Text 30"/>
+          <p:cNvSpPr/>
+          <p:nvPr/>
+        </p:nvSpPr>
+        <p:spPr>
+          <a:xfrm>
+            <a:off x="680466" y="4542830"/>
+            <a:ext cx="2487168" cy="247650"/>
+          </a:xfrm>
+          <a:prstGeom prst="rect">
+            <a:avLst/>
+          </a:prstGeom>
+          <a:noFill/>
+          <a:ln/>
+        </p:spPr>
+        <p:txBody>
+          <a:bodyPr wrap="square" lIns="0" tIns="0" rIns="0" bIns="0" rtlCol="0" anchor="t"/>
+          <a:lstStyle/>
+          <a:p>
+            <a:pPr algn="ctr" indent="0" marL="0">
+              <a:spcBef>
+                <a:spcPts val="100"/>
+              </a:spcBef>
+              <a:buNone/>
+            </a:pPr>
+            <a:r>
+              <a:rPr lang="en-US" sz="1400" dirty="0">
+                <a:solidFill>
+                  <a:srgbClr val="4B545C"/>
+                </a:solidFill>
+                <a:latin typeface="Noto Sans" pitchFamily="34" charset="0"/>
+                <a:ea typeface="Noto Sans" pitchFamily="34" charset="-122"/>
+                <a:cs typeface="Noto Sans" pitchFamily="34" charset="-120"/>
+              </a:rPr>
+              <a:t>well</a:t>
+            </a:r>
+            <a:endParaRPr lang="en-US" sz="1400" dirty="0"/>
+          </a:p>
+        </p:txBody>
+      </p:sp>
+      <p:sp>
+        <p:nvSpPr>
+          <p:cNvPr id="33" name="Text 31"/>
+          <p:cNvSpPr/>
+          <p:nvPr/>
+        </p:nvSpPr>
+        <p:spPr>
+          <a:xfrm>
+            <a:off x="680466" y="4853880"/>
+            <a:ext cx="2487168" cy="200025"/>
+          </a:xfrm>
+          <a:prstGeom prst="rect">
+            <a:avLst/>
+          </a:prstGeom>
+          <a:noFill/>
+          <a:ln/>
+        </p:spPr>
+        <p:txBody>
+          <a:bodyPr wrap="square" lIns="0" tIns="0" rIns="0" bIns="0" rtlCol="0" anchor="t"/>
+          <a:lstStyle/>
+          <a:p>
+            <a:pPr algn="ctr" indent="0" marL="0">
+              <a:spcBef>
+                <a:spcPts val="500"/>
+              </a:spcBef>
+              <a:buNone/>
+            </a:pPr>
+            <a:r>
+              <a:rPr lang="en-US" sz="1100" dirty="0">
+                <a:solidFill>
+                  <a:srgbClr val="6E7780"/>
+                </a:solidFill>
+                <a:latin typeface="Noto Sans" pitchFamily="34" charset="0"/>
+                <a:ea typeface="Noto Sans" pitchFamily="34" charset="-122"/>
+                <a:cs typeface="Noto Sans" pitchFamily="34" charset="-120"/>
+              </a:rPr>
+              <a:t>第十四课 p.137</a:t>
+            </a:r>
+            <a:endParaRPr lang="en-US" sz="1100" dirty="0"/>
+          </a:p>
+        </p:txBody>
+      </p:sp>
+      <p:sp>
+        <p:nvSpPr>
+          <p:cNvPr id="34" name="Text 32"/>
+          <p:cNvSpPr/>
+          <p:nvPr/>
+        </p:nvSpPr>
+        <p:spPr>
+          <a:xfrm>
+            <a:off x="3390900" y="3478113"/>
+            <a:ext cx="2628900" cy="1721793"/>
+          </a:xfrm>
+          <a:prstGeom prst="roundRect">
+            <a:avLst>
+              <a:gd name="adj" fmla="val 3688"/>
+            </a:avLst>
+          </a:prstGeom>
+          <a:solidFill>
+            <a:srgbClr val="E6EAEB"/>
+          </a:solidFill>
+          <a:ln w="19050">
+            <a:solidFill>
+              <a:srgbClr val="D5DBDD"/>
+            </a:solidFill>
+          </a:ln>
+        </p:spPr>
+        <p:txBody>
+          <a:bodyPr wrap="square" rtlCol="0" anchor="ctr"/>
+          <a:lstStyle/>
+          <a:p>
+            <a:pPr indent="0" marL="0">
+              <a:buNone/>
+            </a:pPr>
+            <a:endParaRPr lang="en-US" dirty="0"/>
+          </a:p>
+        </p:txBody>
+      </p:sp>
+      <p:sp>
+        <p:nvSpPr>
+          <p:cNvPr id="35" name="Text 33"/>
+          <p:cNvSpPr/>
+          <p:nvPr/>
+        </p:nvSpPr>
+        <p:spPr>
+          <a:xfrm>
+            <a:off x="3461766" y="3636764"/>
+            <a:ext cx="2487168" cy="575965"/>
+          </a:xfrm>
+          <a:prstGeom prst="rect">
+            <a:avLst/>
+          </a:prstGeom>
+          <a:noFill/>
+          <a:ln/>
+        </p:spPr>
+        <p:txBody>
+          <a:bodyPr wrap="square" lIns="0" tIns="0" rIns="0" bIns="0" rtlCol="0" anchor="t"/>
+          <a:lstStyle/>
+          <a:p>
+            <a:pPr algn="ctr" indent="0" marL="0">
+              <a:lnSpc>
+                <a:spcPts val="4536"/>
+              </a:lnSpc>
+              <a:buNone/>
+            </a:pPr>
+            <a:r>
+              <a:rPr lang="en-US" sz="4200" b="1" dirty="0">
+                <a:solidFill>
+                  <a:srgbClr val="262B30"/>
+                </a:solidFill>
                 <a:latin typeface="Noto Serif SC" pitchFamily="34" charset="0"/>
                 <a:ea typeface="Noto Serif SC" pitchFamily="34" charset="-122"/>
                 <a:cs typeface="Noto Serif SC" pitchFamily="34" charset="-120"/>
               </a:rPr>
-              <a:t>问成「……吗？」的，这一轮作废</a:t>
+              <a:t>亡</a:t>
+            </a:r>
+            <a:endParaRPr lang="en-US" sz="4200" dirty="0"/>
+          </a:p>
+        </p:txBody>
+      </p:sp>
+      <p:sp>
+        <p:nvSpPr>
+          <p:cNvPr id="36" name="Text 34"/>
+          <p:cNvSpPr/>
+          <p:nvPr/>
+        </p:nvSpPr>
+        <p:spPr>
+          <a:xfrm>
+            <a:off x="3461766" y="4263479"/>
+            <a:ext cx="2487168" cy="266700"/>
+          </a:xfrm>
+          <a:prstGeom prst="rect">
+            <a:avLst/>
+          </a:prstGeom>
+          <a:noFill/>
+          <a:ln/>
+        </p:spPr>
+        <p:txBody>
+          <a:bodyPr wrap="square" lIns="0" tIns="0" rIns="0" bIns="0" rtlCol="0" anchor="t"/>
+          <a:lstStyle/>
+          <a:p>
+            <a:pPr algn="ctr" indent="0" marL="0">
+              <a:spcBef>
+                <a:spcPts val="400"/>
+              </a:spcBef>
+              <a:buNone/>
+            </a:pPr>
+            <a:r>
+              <a:rPr lang="en-US" sz="1500" b="1" dirty="0">
+                <a:solidFill>
+                  <a:srgbClr val="3D5A73"/>
+                </a:solidFill>
+                <a:latin typeface="Noto Sans" pitchFamily="34" charset="0"/>
+                <a:ea typeface="Noto Sans" pitchFamily="34" charset="-122"/>
+                <a:cs typeface="Noto Sans" pitchFamily="34" charset="-120"/>
+              </a:rPr>
+              <a:t>wáng</a:t>
             </a:r>
             <a:endParaRPr lang="en-US" sz="1500" dirty="0"/>
           </a:p>
@@ -9882,13 +10530,505 @@
       </p:sp>
       <p:sp>
         <p:nvSpPr>
-          <p:cNvPr id="25" name="Text 23"/>
-          <p:cNvSpPr/>
-          <p:nvPr/>
-        </p:nvSpPr>
-        <p:spPr>
-          <a:xfrm>
-            <a:off x="609600" y="5259288"/>
+          <p:cNvPr id="37" name="Text 35"/>
+          <p:cNvSpPr/>
+          <p:nvPr/>
+        </p:nvSpPr>
+        <p:spPr>
+          <a:xfrm>
+            <a:off x="3461766" y="4542830"/>
+            <a:ext cx="2487168" cy="247650"/>
+          </a:xfrm>
+          <a:prstGeom prst="rect">
+            <a:avLst/>
+          </a:prstGeom>
+          <a:noFill/>
+          <a:ln/>
+        </p:spPr>
+        <p:txBody>
+          <a:bodyPr wrap="square" lIns="0" tIns="0" rIns="0" bIns="0" rtlCol="0" anchor="t"/>
+          <a:lstStyle/>
+          <a:p>
+            <a:pPr algn="ctr" indent="0" marL="0">
+              <a:spcBef>
+                <a:spcPts val="100"/>
+              </a:spcBef>
+              <a:buNone/>
+            </a:pPr>
+            <a:r>
+              <a:rPr lang="en-US" sz="1400" dirty="0">
+                <a:solidFill>
+                  <a:srgbClr val="4B545C"/>
+                </a:solidFill>
+                <a:latin typeface="Noto Sans" pitchFamily="34" charset="0"/>
+                <a:ea typeface="Noto Sans" pitchFamily="34" charset="-122"/>
+                <a:cs typeface="Noto Sans" pitchFamily="34" charset="-120"/>
+              </a:rPr>
+              <a:t>die</a:t>
+            </a:r>
+            <a:endParaRPr lang="en-US" sz="1400" dirty="0"/>
+          </a:p>
+        </p:txBody>
+      </p:sp>
+      <p:sp>
+        <p:nvSpPr>
+          <p:cNvPr id="38" name="Text 36"/>
+          <p:cNvSpPr/>
+          <p:nvPr/>
+        </p:nvSpPr>
+        <p:spPr>
+          <a:xfrm>
+            <a:off x="3461766" y="4853880"/>
+            <a:ext cx="2487168" cy="200025"/>
+          </a:xfrm>
+          <a:prstGeom prst="rect">
+            <a:avLst/>
+          </a:prstGeom>
+          <a:noFill/>
+          <a:ln/>
+        </p:spPr>
+        <p:txBody>
+          <a:bodyPr wrap="square" lIns="0" tIns="0" rIns="0" bIns="0" rtlCol="0" anchor="t"/>
+          <a:lstStyle/>
+          <a:p>
+            <a:pPr algn="ctr" indent="0" marL="0">
+              <a:spcBef>
+                <a:spcPts val="500"/>
+              </a:spcBef>
+              <a:buNone/>
+            </a:pPr>
+            <a:r>
+              <a:rPr lang="en-US" sz="1100" dirty="0">
+                <a:solidFill>
+                  <a:srgbClr val="6E7780"/>
+                </a:solidFill>
+                <a:latin typeface="Noto Sans" pitchFamily="34" charset="0"/>
+                <a:ea typeface="Noto Sans" pitchFamily="34" charset="-122"/>
+                <a:cs typeface="Noto Sans" pitchFamily="34" charset="-120"/>
+              </a:rPr>
+              <a:t>第十四课 p.137</a:t>
+            </a:r>
+            <a:endParaRPr lang="en-US" sz="1100" dirty="0"/>
+          </a:p>
+        </p:txBody>
+      </p:sp>
+      <p:sp>
+        <p:nvSpPr>
+          <p:cNvPr id="39" name="Text 37"/>
+          <p:cNvSpPr/>
+          <p:nvPr/>
+        </p:nvSpPr>
+        <p:spPr>
+          <a:xfrm>
+            <a:off x="6172200" y="3478113"/>
+            <a:ext cx="2628900" cy="1721793"/>
+          </a:xfrm>
+          <a:prstGeom prst="roundRect">
+            <a:avLst>
+              <a:gd name="adj" fmla="val 3688"/>
+            </a:avLst>
+          </a:prstGeom>
+          <a:solidFill>
+            <a:srgbClr val="E6EAEB"/>
+          </a:solidFill>
+          <a:ln w="19050">
+            <a:solidFill>
+              <a:srgbClr val="D5DBDD"/>
+            </a:solidFill>
+          </a:ln>
+        </p:spPr>
+        <p:txBody>
+          <a:bodyPr wrap="square" rtlCol="0" anchor="ctr"/>
+          <a:lstStyle/>
+          <a:p>
+            <a:pPr indent="0" marL="0">
+              <a:buNone/>
+            </a:pPr>
+            <a:endParaRPr lang="en-US" dirty="0"/>
+          </a:p>
+        </p:txBody>
+      </p:sp>
+      <p:sp>
+        <p:nvSpPr>
+          <p:cNvPr id="40" name="Text 38"/>
+          <p:cNvSpPr/>
+          <p:nvPr/>
+        </p:nvSpPr>
+        <p:spPr>
+          <a:xfrm>
+            <a:off x="6243066" y="3636764"/>
+            <a:ext cx="2487168" cy="575965"/>
+          </a:xfrm>
+          <a:prstGeom prst="rect">
+            <a:avLst/>
+          </a:prstGeom>
+          <a:noFill/>
+          <a:ln/>
+        </p:spPr>
+        <p:txBody>
+          <a:bodyPr wrap="square" lIns="0" tIns="0" rIns="0" bIns="0" rtlCol="0" anchor="t"/>
+          <a:lstStyle/>
+          <a:p>
+            <a:pPr algn="ctr" indent="0" marL="0">
+              <a:lnSpc>
+                <a:spcPts val="4536"/>
+              </a:lnSpc>
+              <a:buNone/>
+            </a:pPr>
+            <a:r>
+              <a:rPr lang="en-US" sz="4200" b="1" dirty="0">
+                <a:solidFill>
+                  <a:srgbClr val="262B30"/>
+                </a:solidFill>
+                <a:latin typeface="Noto Serif SC" pitchFamily="34" charset="0"/>
+                <a:ea typeface="Noto Serif SC" pitchFamily="34" charset="-122"/>
+                <a:cs typeface="Noto Serif SC" pitchFamily="34" charset="-120"/>
+              </a:rPr>
+              <a:t>乌</a:t>
+            </a:r>
+            <a:endParaRPr lang="en-US" sz="4200" dirty="0"/>
+          </a:p>
+        </p:txBody>
+      </p:sp>
+      <p:sp>
+        <p:nvSpPr>
+          <p:cNvPr id="41" name="Text 39"/>
+          <p:cNvSpPr/>
+          <p:nvPr/>
+        </p:nvSpPr>
+        <p:spPr>
+          <a:xfrm>
+            <a:off x="6243066" y="4263479"/>
+            <a:ext cx="2487168" cy="266700"/>
+          </a:xfrm>
+          <a:prstGeom prst="rect">
+            <a:avLst/>
+          </a:prstGeom>
+          <a:noFill/>
+          <a:ln/>
+        </p:spPr>
+        <p:txBody>
+          <a:bodyPr wrap="square" lIns="0" tIns="0" rIns="0" bIns="0" rtlCol="0" anchor="t"/>
+          <a:lstStyle/>
+          <a:p>
+            <a:pPr algn="ctr" indent="0" marL="0">
+              <a:spcBef>
+                <a:spcPts val="400"/>
+              </a:spcBef>
+              <a:buNone/>
+            </a:pPr>
+            <a:r>
+              <a:rPr lang="en-US" sz="1500" b="1" dirty="0">
+                <a:solidFill>
+                  <a:srgbClr val="3D5A73"/>
+                </a:solidFill>
+                <a:latin typeface="Noto Sans" pitchFamily="34" charset="0"/>
+                <a:ea typeface="Noto Sans" pitchFamily="34" charset="-122"/>
+                <a:cs typeface="Noto Sans" pitchFamily="34" charset="-120"/>
+              </a:rPr>
+              <a:t>wū</a:t>
+            </a:r>
+            <a:endParaRPr lang="en-US" sz="1500" dirty="0"/>
+          </a:p>
+        </p:txBody>
+      </p:sp>
+      <p:sp>
+        <p:nvSpPr>
+          <p:cNvPr id="42" name="Text 40"/>
+          <p:cNvSpPr/>
+          <p:nvPr/>
+        </p:nvSpPr>
+        <p:spPr>
+          <a:xfrm>
+            <a:off x="6243066" y="4542830"/>
+            <a:ext cx="2487168" cy="247650"/>
+          </a:xfrm>
+          <a:prstGeom prst="rect">
+            <a:avLst/>
+          </a:prstGeom>
+          <a:noFill/>
+          <a:ln/>
+        </p:spPr>
+        <p:txBody>
+          <a:bodyPr wrap="square" lIns="0" tIns="0" rIns="0" bIns="0" rtlCol="0" anchor="t"/>
+          <a:lstStyle/>
+          <a:p>
+            <a:pPr algn="ctr" indent="0" marL="0">
+              <a:spcBef>
+                <a:spcPts val="100"/>
+              </a:spcBef>
+              <a:buNone/>
+            </a:pPr>
+            <a:r>
+              <a:rPr lang="en-US" sz="1400" dirty="0">
+                <a:solidFill>
+                  <a:srgbClr val="4B545C"/>
+                </a:solidFill>
+                <a:latin typeface="Noto Sans" pitchFamily="34" charset="0"/>
+                <a:ea typeface="Noto Sans" pitchFamily="34" charset="-122"/>
+                <a:cs typeface="Noto Sans" pitchFamily="34" charset="-120"/>
+              </a:rPr>
+              <a:t>black; dark</a:t>
+            </a:r>
+            <a:endParaRPr lang="en-US" sz="1400" dirty="0"/>
+          </a:p>
+        </p:txBody>
+      </p:sp>
+      <p:sp>
+        <p:nvSpPr>
+          <p:cNvPr id="43" name="Text 41"/>
+          <p:cNvSpPr/>
+          <p:nvPr/>
+        </p:nvSpPr>
+        <p:spPr>
+          <a:xfrm>
+            <a:off x="6243066" y="4853880"/>
+            <a:ext cx="2487168" cy="200025"/>
+          </a:xfrm>
+          <a:prstGeom prst="rect">
+            <a:avLst/>
+          </a:prstGeom>
+          <a:noFill/>
+          <a:ln/>
+        </p:spPr>
+        <p:txBody>
+          <a:bodyPr wrap="square" lIns="0" tIns="0" rIns="0" bIns="0" rtlCol="0" anchor="t"/>
+          <a:lstStyle/>
+          <a:p>
+            <a:pPr algn="ctr" indent="0" marL="0">
+              <a:spcBef>
+                <a:spcPts val="500"/>
+              </a:spcBef>
+              <a:buNone/>
+            </a:pPr>
+            <a:r>
+              <a:rPr lang="en-US" sz="1100" dirty="0">
+                <a:solidFill>
+                  <a:srgbClr val="6E7780"/>
+                </a:solidFill>
+                <a:latin typeface="Noto Sans" pitchFamily="34" charset="0"/>
+                <a:ea typeface="Noto Sans" pitchFamily="34" charset="-122"/>
+                <a:cs typeface="Noto Sans" pitchFamily="34" charset="-120"/>
+              </a:rPr>
+              <a:t>第十四课 p.137</a:t>
+            </a:r>
+            <a:endParaRPr lang="en-US" sz="1100" dirty="0"/>
+          </a:p>
+        </p:txBody>
+      </p:sp>
+      <p:sp>
+        <p:nvSpPr>
+          <p:cNvPr id="44" name="Text 42"/>
+          <p:cNvSpPr/>
+          <p:nvPr/>
+        </p:nvSpPr>
+        <p:spPr>
+          <a:xfrm>
+            <a:off x="8953500" y="3478113"/>
+            <a:ext cx="2628900" cy="1721793"/>
+          </a:xfrm>
+          <a:prstGeom prst="roundRect">
+            <a:avLst>
+              <a:gd name="adj" fmla="val 3688"/>
+            </a:avLst>
+          </a:prstGeom>
+          <a:solidFill>
+            <a:srgbClr val="E6EAEB"/>
+          </a:solidFill>
+          <a:ln w="19050">
+            <a:solidFill>
+              <a:srgbClr val="D5DBDD"/>
+            </a:solidFill>
+          </a:ln>
+        </p:spPr>
+        <p:txBody>
+          <a:bodyPr wrap="square" rtlCol="0" anchor="ctr"/>
+          <a:lstStyle/>
+          <a:p>
+            <a:pPr indent="0" marL="0">
+              <a:buNone/>
+            </a:pPr>
+            <a:endParaRPr lang="en-US" dirty="0"/>
+          </a:p>
+        </p:txBody>
+      </p:sp>
+      <p:sp>
+        <p:nvSpPr>
+          <p:cNvPr id="45" name="Text 43"/>
+          <p:cNvSpPr/>
+          <p:nvPr/>
+        </p:nvSpPr>
+        <p:spPr>
+          <a:xfrm>
+            <a:off x="9024366" y="3636764"/>
+            <a:ext cx="2487168" cy="575965"/>
+          </a:xfrm>
+          <a:prstGeom prst="rect">
+            <a:avLst/>
+          </a:prstGeom>
+          <a:noFill/>
+          <a:ln/>
+        </p:spPr>
+        <p:txBody>
+          <a:bodyPr wrap="square" lIns="0" tIns="0" rIns="0" bIns="0" rtlCol="0" anchor="t"/>
+          <a:lstStyle/>
+          <a:p>
+            <a:pPr algn="ctr" indent="0" marL="0">
+              <a:lnSpc>
+                <a:spcPts val="4536"/>
+              </a:lnSpc>
+              <a:buNone/>
+            </a:pPr>
+            <a:r>
+              <a:rPr lang="en-US" sz="4200" b="1" dirty="0">
+                <a:solidFill>
+                  <a:srgbClr val="262B30"/>
+                </a:solidFill>
+                <a:latin typeface="Noto Serif SC" pitchFamily="34" charset="0"/>
+                <a:ea typeface="Noto Serif SC" pitchFamily="34" charset="-122"/>
+                <a:cs typeface="Noto Serif SC" pitchFamily="34" charset="-120"/>
+              </a:rPr>
+              <a:t>勺</a:t>
+            </a:r>
+            <a:endParaRPr lang="en-US" sz="4200" dirty="0"/>
+          </a:p>
+        </p:txBody>
+      </p:sp>
+      <p:sp>
+        <p:nvSpPr>
+          <p:cNvPr id="46" name="Text 44"/>
+          <p:cNvSpPr/>
+          <p:nvPr/>
+        </p:nvSpPr>
+        <p:spPr>
+          <a:xfrm>
+            <a:off x="9024366" y="4263479"/>
+            <a:ext cx="2487168" cy="266700"/>
+          </a:xfrm>
+          <a:prstGeom prst="rect">
+            <a:avLst/>
+          </a:prstGeom>
+          <a:noFill/>
+          <a:ln/>
+        </p:spPr>
+        <p:txBody>
+          <a:bodyPr wrap="square" lIns="0" tIns="0" rIns="0" bIns="0" rtlCol="0" anchor="t"/>
+          <a:lstStyle/>
+          <a:p>
+            <a:pPr algn="ctr" indent="0" marL="0">
+              <a:spcBef>
+                <a:spcPts val="400"/>
+              </a:spcBef>
+              <a:buNone/>
+            </a:pPr>
+            <a:r>
+              <a:rPr lang="en-US" sz="1500" b="1" dirty="0">
+                <a:solidFill>
+                  <a:srgbClr val="3D5A73"/>
+                </a:solidFill>
+                <a:latin typeface="Noto Sans" pitchFamily="34" charset="0"/>
+                <a:ea typeface="Noto Sans" pitchFamily="34" charset="-122"/>
+                <a:cs typeface="Noto Sans" pitchFamily="34" charset="-120"/>
+              </a:rPr>
+              <a:t>sháo</a:t>
+            </a:r>
+            <a:endParaRPr lang="en-US" sz="1500" dirty="0"/>
+          </a:p>
+        </p:txBody>
+      </p:sp>
+      <p:sp>
+        <p:nvSpPr>
+          <p:cNvPr id="47" name="Text 45"/>
+          <p:cNvSpPr/>
+          <p:nvPr/>
+        </p:nvSpPr>
+        <p:spPr>
+          <a:xfrm>
+            <a:off x="9024366" y="4542830"/>
+            <a:ext cx="2487168" cy="247650"/>
+          </a:xfrm>
+          <a:prstGeom prst="rect">
+            <a:avLst/>
+          </a:prstGeom>
+          <a:noFill/>
+          <a:ln/>
+        </p:spPr>
+        <p:txBody>
+          <a:bodyPr wrap="square" lIns="0" tIns="0" rIns="0" bIns="0" rtlCol="0" anchor="t"/>
+          <a:lstStyle/>
+          <a:p>
+            <a:pPr algn="ctr" indent="0" marL="0">
+              <a:spcBef>
+                <a:spcPts val="100"/>
+              </a:spcBef>
+              <a:buNone/>
+            </a:pPr>
+            <a:r>
+              <a:rPr lang="en-US" sz="1400" dirty="0">
+                <a:solidFill>
+                  <a:srgbClr val="4B545C"/>
+                </a:solidFill>
+                <a:latin typeface="Noto Sans" pitchFamily="34" charset="0"/>
+                <a:ea typeface="Noto Sans" pitchFamily="34" charset="-122"/>
+                <a:cs typeface="Noto Sans" pitchFamily="34" charset="-120"/>
+              </a:rPr>
+              <a:t>spoon</a:t>
+            </a:r>
+            <a:endParaRPr lang="en-US" sz="1400" dirty="0"/>
+          </a:p>
+        </p:txBody>
+      </p:sp>
+      <p:sp>
+        <p:nvSpPr>
+          <p:cNvPr id="48" name="Text 46"/>
+          <p:cNvSpPr/>
+          <p:nvPr/>
+        </p:nvSpPr>
+        <p:spPr>
+          <a:xfrm>
+            <a:off x="9024366" y="4853880"/>
+            <a:ext cx="2487168" cy="200025"/>
+          </a:xfrm>
+          <a:prstGeom prst="rect">
+            <a:avLst/>
+          </a:prstGeom>
+          <a:noFill/>
+          <a:ln/>
+        </p:spPr>
+        <p:txBody>
+          <a:bodyPr wrap="square" lIns="0" tIns="0" rIns="0" bIns="0" rtlCol="0" anchor="t"/>
+          <a:lstStyle/>
+          <a:p>
+            <a:pPr algn="ctr" indent="0" marL="0">
+              <a:spcBef>
+                <a:spcPts val="500"/>
+              </a:spcBef>
+              <a:buNone/>
+            </a:pPr>
+            <a:r>
+              <a:rPr lang="en-US" sz="1100" dirty="0">
+                <a:solidFill>
+                  <a:srgbClr val="6E7780"/>
+                </a:solidFill>
+                <a:latin typeface="Noto Sans" pitchFamily="34" charset="0"/>
+                <a:ea typeface="Noto Sans" pitchFamily="34" charset="-122"/>
+                <a:cs typeface="Noto Sans" pitchFamily="34" charset="-120"/>
+              </a:rPr>
+              <a:t>第十四课 p.137</a:t>
+            </a:r>
+            <a:endParaRPr lang="en-US" sz="1100" dirty="0"/>
+          </a:p>
+        </p:txBody>
+      </p:sp>
+      <p:sp>
+        <p:nvSpPr>
+          <p:cNvPr id="49" name="Text 47"/>
+          <p:cNvSpPr/>
+          <p:nvPr/>
+        </p:nvSpPr>
+        <p:spPr>
+          <a:xfrm>
+            <a:off x="609600" y="5352306"/>
             <a:ext cx="11192256" cy="228600"/>
           </a:xfrm>
           <a:prstGeom prst="rect">
@@ -9906,7 +11046,7 @@
                 <a:spcPts val="1800"/>
               </a:lnSpc>
               <a:spcBef>
-                <a:spcPts val="800"/>
+                <a:spcPts val="1200"/>
               </a:spcBef>
               <a:buNone/>
             </a:pPr>
@@ -9919,7 +11059,7 @@
                 <a:ea typeface="Noto Sans" pitchFamily="34" charset="-122"/>
                 <a:cs typeface="Noto Sans" pitchFamily="34" charset="-120"/>
               </a:rPr>
-              <a:t>什么都不用准备。问题接不上的时候，用上一页的七组问题。</a:t>
+              <a:t>这八个字，这个单元一直没教——现在看九十秒，因为下面两轮要用，单元测验也要用。有的就藏在后面那六个字里面。</a:t>
             </a:r>
             <a:endParaRPr lang="en-US" sz="1200" dirty="0"/>
           </a:p>
@@ -10096,8 +11236,8 @@
         </p:nvSpPr>
         <p:spPr>
           <a:xfrm>
-            <a:off x="11231910" y="176213"/>
-            <a:ext cx="461183" cy="180975"/>
+            <a:off x="11233696" y="176213"/>
+            <a:ext cx="459361" cy="180975"/>
           </a:xfrm>
           <a:prstGeom prst="rect">
             <a:avLst/>
@@ -10121,7 +11261,7 @@
                 <a:ea typeface="Noto Sans" pitchFamily="34" charset="-122"/>
                 <a:cs typeface="Noto Sans" pitchFamily="34" charset="-120"/>
               </a:rPr>
-              <a:t>19 / 19</a:t>
+              <a:t>21 / 21</a:t>
             </a:r>
             <a:endParaRPr lang="en-US" sz="1000" dirty="0"/>
           </a:p>
@@ -10682,8 +11822,8 @@
         </p:nvSpPr>
         <p:spPr>
           <a:xfrm>
-            <a:off x="11290548" y="176213"/>
-            <a:ext cx="401372" cy="180975"/>
+            <a:off x="11291441" y="176213"/>
+            <a:ext cx="400461" cy="180975"/>
           </a:xfrm>
           <a:prstGeom prst="rect">
             <a:avLst/>
@@ -10707,7 +11847,7 @@
                 <a:ea typeface="Noto Sans" pitchFamily="34" charset="-122"/>
                 <a:cs typeface="Noto Sans" pitchFamily="34" charset="-120"/>
               </a:rPr>
-              <a:t>2 / 19</a:t>
+              <a:t>2 / 21</a:t>
             </a:r>
             <a:endParaRPr lang="en-US" sz="1000" dirty="0"/>
           </a:p>
@@ -11969,6 +13109,2125 @@
                 <a:cs typeface="Noto Sans" pitchFamily="34" charset="-120"/>
               </a:rPr>
               <a:t>，九十秒写出中文，量词也要写。写得最多的念一遍，全班一起补。</a:t>
+            </a:r>
+            <a:endParaRPr lang="en-US" sz="1200" dirty="0"/>
+          </a:p>
+        </p:txBody>
+      </p:sp>
+    </p:spTree>
+  </p:cSld>
+  <p:clrMapOvr>
+    <a:masterClrMapping/>
+  </p:clrMapOvr>
+</p:sld>
+</file>
+
+<file path=ppt/slides/slide20.xml><?xml version="1.0" encoding="utf-8"?>
+<p:sld xmlns:a="http://schemas.openxmlformats.org/drawingml/2006/main" xmlns:r="http://schemas.openxmlformats.org/officeDocument/2006/relationships" xmlns:p="http://schemas.openxmlformats.org/presentationml/2006/main">
+  <p:cSld name="Slide 20">
+    <p:bg>
+      <p:bgPr>
+        <a:solidFill>
+          <a:srgbClr val="F2F4F4"/>
+        </a:solidFill>
+      </p:bgPr>
+    </p:bg>
+    <p:spTree>
+      <p:nvGrpSpPr>
+        <p:cNvPr id="1" name=""/>
+        <p:cNvGrpSpPr/>
+        <p:nvPr/>
+      </p:nvGrpSpPr>
+      <p:grpSpPr>
+        <a:xfrm>
+          <a:off x="0" y="0"/>
+          <a:ext cx="0" cy="0"/>
+          <a:chOff x="0" y="0"/>
+          <a:chExt cx="0" cy="0"/>
+        </a:xfrm>
+      </p:grpSpPr>
+      <p:sp>
+        <p:nvSpPr>
+          <p:cNvPr id="2" name="Text 0"/>
+          <p:cNvSpPr/>
+          <p:nvPr/>
+        </p:nvSpPr>
+        <p:spPr>
+          <a:xfrm>
+            <a:off x="0" y="0"/>
+            <a:ext cx="12192000" cy="542925"/>
+          </a:xfrm>
+          <a:prstGeom prst="rect">
+            <a:avLst/>
+          </a:prstGeom>
+          <a:solidFill>
+            <a:srgbClr val="F2F4F4"/>
+          </a:solidFill>
+          <a:ln/>
+        </p:spPr>
+        <p:txBody>
+          <a:bodyPr wrap="square" rtlCol="0" anchor="ctr"/>
+          <a:lstStyle/>
+          <a:p>
+            <a:pPr indent="0" marL="0">
+              <a:buNone/>
+            </a:pPr>
+            <a:endParaRPr lang="en-US" dirty="0"/>
+          </a:p>
+        </p:txBody>
+      </p:sp>
+      <p:sp>
+        <p:nvSpPr>
+          <p:cNvPr id="3" name="Shape 1"/>
+          <p:cNvSpPr/>
+          <p:nvPr/>
+        </p:nvSpPr>
+        <p:spPr>
+          <a:xfrm>
+            <a:off x="0" y="538163"/>
+            <a:ext cx="12192000" cy="0"/>
+          </a:xfrm>
+          <a:prstGeom prst="line">
+            <a:avLst/>
+          </a:prstGeom>
+          <a:noFill/>
+          <a:ln w="9525">
+            <a:solidFill>
+              <a:srgbClr val="D5DBDD"/>
+            </a:solidFill>
+            <a:prstDash val="solid"/>
+          </a:ln>
+        </p:spPr>
+      </p:sp>
+      <p:sp>
+        <p:nvSpPr>
+          <p:cNvPr id="4" name="Text 2"/>
+          <p:cNvSpPr/>
+          <p:nvPr/>
+        </p:nvSpPr>
+        <p:spPr>
+          <a:xfrm>
+            <a:off x="507950" y="176213"/>
+            <a:ext cx="2644893" cy="180975"/>
+          </a:xfrm>
+          <a:prstGeom prst="rect">
+            <a:avLst/>
+          </a:prstGeom>
+          <a:noFill/>
+          <a:ln/>
+        </p:spPr>
+        <p:txBody>
+          <a:bodyPr wrap="square" lIns="0" tIns="0" rIns="0" bIns="0" rtlCol="0" anchor="t"/>
+          <a:lstStyle/>
+          <a:p>
+            <a:pPr algn="l" indent="0" marL="0">
+              <a:buNone/>
+            </a:pPr>
+            <a:r>
+              <a:rPr lang="en-US" sz="1000" b="1" dirty="0">
+                <a:solidFill>
+                  <a:srgbClr val="B05B3B"/>
+                </a:solidFill>
+                <a:latin typeface="Noto Sans" pitchFamily="34" charset="0"/>
+                <a:ea typeface="Noto Sans" pitchFamily="34" charset="-122"/>
+                <a:cs typeface="Noto Sans" pitchFamily="34" charset="-120"/>
+              </a:rPr>
+              <a:t>20–43 MIN · FLEXIBLE PRACTICE</a:t>
+            </a:r>
+            <a:endParaRPr lang="en-US" sz="1000" dirty="0"/>
+          </a:p>
+        </p:txBody>
+      </p:sp>
+      <p:sp>
+        <p:nvSpPr>
+          <p:cNvPr id="5" name="Text 3"/>
+          <p:cNvSpPr/>
+          <p:nvPr/>
+        </p:nvSpPr>
+        <p:spPr>
+          <a:xfrm>
+            <a:off x="3386435" y="166688"/>
+            <a:ext cx="1656796" cy="200025"/>
+          </a:xfrm>
+          <a:prstGeom prst="rect">
+            <a:avLst/>
+          </a:prstGeom>
+          <a:noFill/>
+          <a:ln/>
+        </p:spPr>
+        <p:txBody>
+          <a:bodyPr wrap="square" lIns="0" tIns="0" rIns="0" bIns="0" rtlCol="0" anchor="t"/>
+          <a:lstStyle/>
+          <a:p>
+            <a:pPr algn="l" indent="0" marL="0">
+              <a:buNone/>
+            </a:pPr>
+            <a:r>
+              <a:rPr lang="en-US" sz="1100" dirty="0">
+                <a:solidFill>
+                  <a:srgbClr val="4B545C"/>
+                </a:solidFill>
+                <a:latin typeface="Noto Sans" pitchFamily="34" charset="0"/>
+                <a:ea typeface="Noto Sans" pitchFamily="34" charset="-122"/>
+                <a:cs typeface="Noto Sans" pitchFamily="34" charset="-120"/>
+              </a:rPr>
+              <a:t>游戏 · 第二步 · 部首抢答</a:t>
+            </a:r>
+            <a:endParaRPr lang="en-US" sz="1100" dirty="0"/>
+          </a:p>
+        </p:txBody>
+      </p:sp>
+      <p:sp>
+        <p:nvSpPr>
+          <p:cNvPr id="6" name="Text 4"/>
+          <p:cNvSpPr/>
+          <p:nvPr/>
+        </p:nvSpPr>
+        <p:spPr>
+          <a:xfrm>
+            <a:off x="11232803" y="176213"/>
+            <a:ext cx="460272" cy="180975"/>
+          </a:xfrm>
+          <a:prstGeom prst="rect">
+            <a:avLst/>
+          </a:prstGeom>
+          <a:noFill/>
+          <a:ln/>
+        </p:spPr>
+        <p:txBody>
+          <a:bodyPr wrap="square" lIns="0" tIns="0" rIns="0" bIns="0" rtlCol="0" anchor="t"/>
+          <a:lstStyle/>
+          <a:p>
+            <a:pPr algn="l" indent="0" marL="0">
+              <a:buNone/>
+            </a:pPr>
+            <a:r>
+              <a:rPr lang="en-US" sz="1000" dirty="0">
+                <a:solidFill>
+                  <a:srgbClr val="6E7780"/>
+                </a:solidFill>
+                <a:latin typeface="Noto Sans" pitchFamily="34" charset="0"/>
+                <a:ea typeface="Noto Sans" pitchFamily="34" charset="-122"/>
+                <a:cs typeface="Noto Sans" pitchFamily="34" charset="-120"/>
+              </a:rPr>
+              <a:t>19 / 21</a:t>
+            </a:r>
+            <a:endParaRPr lang="en-US" sz="1000" dirty="0"/>
+          </a:p>
+        </p:txBody>
+      </p:sp>
+      <p:sp>
+        <p:nvSpPr>
+          <p:cNvPr id="7" name="Text 5"/>
+          <p:cNvSpPr/>
+          <p:nvPr/>
+        </p:nvSpPr>
+        <p:spPr>
+          <a:xfrm>
+            <a:off x="507950" y="0"/>
+            <a:ext cx="11176099" cy="31700"/>
+          </a:xfrm>
+          <a:prstGeom prst="rect">
+            <a:avLst/>
+          </a:prstGeom>
+          <a:solidFill>
+            <a:srgbClr val="3D5A73"/>
+          </a:solidFill>
+          <a:ln/>
+        </p:spPr>
+        <p:txBody>
+          <a:bodyPr wrap="square" rtlCol="0" anchor="ctr"/>
+          <a:lstStyle/>
+          <a:p>
+            <a:pPr indent="0" marL="0">
+              <a:buNone/>
+            </a:pPr>
+            <a:endParaRPr lang="en-US" dirty="0"/>
+          </a:p>
+        </p:txBody>
+      </p:sp>
+      <p:sp>
+        <p:nvSpPr>
+          <p:cNvPr id="8" name="Text 6"/>
+          <p:cNvSpPr/>
+          <p:nvPr/>
+        </p:nvSpPr>
+        <p:spPr>
+          <a:xfrm>
+            <a:off x="609600" y="1695599"/>
+            <a:ext cx="11192256" cy="200025"/>
+          </a:xfrm>
+          <a:prstGeom prst="rect">
+            <a:avLst/>
+          </a:prstGeom>
+          <a:noFill/>
+          <a:ln/>
+        </p:spPr>
+        <p:txBody>
+          <a:bodyPr wrap="square" lIns="0" tIns="0" rIns="0" bIns="0" rtlCol="0" anchor="t"/>
+          <a:lstStyle/>
+          <a:p>
+            <a:pPr algn="l" indent="0" marL="0">
+              <a:buNone/>
+            </a:pPr>
+            <a:r>
+              <a:rPr lang="en-US" sz="1100" b="1" dirty="0">
+                <a:solidFill>
+                  <a:srgbClr val="B05B3B"/>
+                </a:solidFill>
+                <a:latin typeface="Noto Sans" pitchFamily="34" charset="0"/>
+                <a:ea typeface="Noto Sans" pitchFamily="34" charset="-122"/>
+                <a:cs typeface="Noto Sans" pitchFamily="34" charset="-120"/>
+              </a:rPr>
+              <a:t>游戏 · 第一轮 · 写部首 · 四人一组，写在纸上</a:t>
+            </a:r>
+            <a:endParaRPr lang="en-US" sz="1100" dirty="0"/>
+          </a:p>
+        </p:txBody>
+      </p:sp>
+      <p:sp>
+        <p:nvSpPr>
+          <p:cNvPr id="9" name="Text 7"/>
+          <p:cNvSpPr/>
+          <p:nvPr/>
+        </p:nvSpPr>
+        <p:spPr>
+          <a:xfrm>
+            <a:off x="609600" y="1895624"/>
+            <a:ext cx="11192256" cy="342900"/>
+          </a:xfrm>
+          <a:prstGeom prst="rect">
+            <a:avLst/>
+          </a:prstGeom>
+          <a:noFill/>
+          <a:ln/>
+        </p:spPr>
+        <p:txBody>
+          <a:bodyPr wrap="square" lIns="0" tIns="0" rIns="0" bIns="0" rtlCol="0" anchor="t"/>
+          <a:lstStyle/>
+          <a:p>
+            <a:pPr algn="l" indent="0" marL="0">
+              <a:lnSpc>
+                <a:spcPts val="2700"/>
+              </a:lnSpc>
+              <a:spcAft>
+                <a:spcPts val="400"/>
+              </a:spcAft>
+              <a:buNone/>
+            </a:pPr>
+            <a:r>
+              <a:rPr lang="en-US" sz="1800" dirty="0">
+                <a:solidFill>
+                  <a:srgbClr val="4B545C"/>
+                </a:solidFill>
+                <a:latin typeface="Noto Sans" pitchFamily="34" charset="0"/>
+                <a:ea typeface="Noto Sans" pitchFamily="34" charset="-122"/>
+                <a:cs typeface="Noto Sans" pitchFamily="34" charset="-120"/>
+              </a:rPr>
+              <a:t>每个字的部首是什么？写下来，再写它的意思。九十秒。</a:t>
+            </a:r>
+            <a:endParaRPr lang="en-US" sz="1800" dirty="0"/>
+          </a:p>
+        </p:txBody>
+      </p:sp>
+      <p:sp>
+        <p:nvSpPr>
+          <p:cNvPr id="10" name="Text 8"/>
+          <p:cNvSpPr/>
+          <p:nvPr/>
+        </p:nvSpPr>
+        <p:spPr>
+          <a:xfrm>
+            <a:off x="609600" y="2390775"/>
+            <a:ext cx="1722983" cy="1282750"/>
+          </a:xfrm>
+          <a:prstGeom prst="roundRect">
+            <a:avLst>
+              <a:gd name="adj" fmla="val 4950"/>
+            </a:avLst>
+          </a:prstGeom>
+          <a:solidFill>
+            <a:srgbClr val="E6EAEB"/>
+          </a:solidFill>
+          <a:ln w="19050">
+            <a:solidFill>
+              <a:srgbClr val="D5DBDD"/>
+            </a:solidFill>
+          </a:ln>
+        </p:spPr>
+        <p:txBody>
+          <a:bodyPr wrap="square" rtlCol="0" anchor="ctr"/>
+          <a:lstStyle/>
+          <a:p>
+            <a:pPr indent="0" marL="0">
+              <a:buNone/>
+            </a:pPr>
+            <a:endParaRPr lang="en-US" dirty="0"/>
+          </a:p>
+        </p:txBody>
+      </p:sp>
+      <p:sp>
+        <p:nvSpPr>
+          <p:cNvPr id="11" name="Text 9"/>
+          <p:cNvSpPr/>
+          <p:nvPr/>
+        </p:nvSpPr>
+        <p:spPr>
+          <a:xfrm>
+            <a:off x="689525" y="2549426"/>
+            <a:ext cx="1563133" cy="603498"/>
+          </a:xfrm>
+          <a:prstGeom prst="rect">
+            <a:avLst/>
+          </a:prstGeom>
+          <a:noFill/>
+          <a:ln/>
+        </p:spPr>
+        <p:txBody>
+          <a:bodyPr wrap="square" lIns="0" tIns="0" rIns="0" bIns="0" rtlCol="0" anchor="t"/>
+          <a:lstStyle/>
+          <a:p>
+            <a:pPr algn="ctr" indent="0" marL="0">
+              <a:lnSpc>
+                <a:spcPts val="4752"/>
+              </a:lnSpc>
+              <a:buNone/>
+            </a:pPr>
+            <a:r>
+              <a:rPr lang="en-US" sz="4400" b="1" dirty="0">
+                <a:solidFill>
+                  <a:srgbClr val="262B30"/>
+                </a:solidFill>
+                <a:latin typeface="Noto Serif SC" pitchFamily="34" charset="0"/>
+                <a:ea typeface="Noto Serif SC" pitchFamily="34" charset="-122"/>
+                <a:cs typeface="Noto Serif SC" pitchFamily="34" charset="-120"/>
+              </a:rPr>
+              <a:t>层</a:t>
+            </a:r>
+            <a:endParaRPr lang="en-US" sz="4400" dirty="0"/>
+          </a:p>
+        </p:txBody>
+      </p:sp>
+      <p:sp>
+        <p:nvSpPr>
+          <p:cNvPr id="12" name="Shape 10"/>
+          <p:cNvSpPr/>
+          <p:nvPr/>
+        </p:nvSpPr>
+        <p:spPr>
+          <a:xfrm>
+            <a:off x="704850" y="3530650"/>
+            <a:ext cx="1532483" cy="0"/>
+          </a:xfrm>
+          <a:prstGeom prst="line">
+            <a:avLst/>
+          </a:prstGeom>
+          <a:noFill/>
+          <a:ln w="19050">
+            <a:solidFill>
+              <a:srgbClr val="6E7780"/>
+            </a:solidFill>
+            <a:prstDash val="solid"/>
+          </a:ln>
+        </p:spPr>
+      </p:sp>
+      <p:sp>
+        <p:nvSpPr>
+          <p:cNvPr id="13" name="Text 11"/>
+          <p:cNvSpPr/>
+          <p:nvPr/>
+        </p:nvSpPr>
+        <p:spPr>
+          <a:xfrm>
+            <a:off x="2459534" y="2390775"/>
+            <a:ext cx="1722983" cy="1282750"/>
+          </a:xfrm>
+          <a:prstGeom prst="roundRect">
+            <a:avLst>
+              <a:gd name="adj" fmla="val 4950"/>
+            </a:avLst>
+          </a:prstGeom>
+          <a:solidFill>
+            <a:srgbClr val="E6EAEB"/>
+          </a:solidFill>
+          <a:ln w="19050">
+            <a:solidFill>
+              <a:srgbClr val="D5DBDD"/>
+            </a:solidFill>
+          </a:ln>
+        </p:spPr>
+        <p:txBody>
+          <a:bodyPr wrap="square" rtlCol="0" anchor="ctr"/>
+          <a:lstStyle/>
+          <a:p>
+            <a:pPr indent="0" marL="0">
+              <a:buNone/>
+            </a:pPr>
+            <a:endParaRPr lang="en-US" dirty="0"/>
+          </a:p>
+        </p:txBody>
+      </p:sp>
+      <p:sp>
+        <p:nvSpPr>
+          <p:cNvPr id="14" name="Text 12"/>
+          <p:cNvSpPr/>
+          <p:nvPr/>
+        </p:nvSpPr>
+        <p:spPr>
+          <a:xfrm>
+            <a:off x="2539459" y="2549426"/>
+            <a:ext cx="1563133" cy="603498"/>
+          </a:xfrm>
+          <a:prstGeom prst="rect">
+            <a:avLst/>
+          </a:prstGeom>
+          <a:noFill/>
+          <a:ln/>
+        </p:spPr>
+        <p:txBody>
+          <a:bodyPr wrap="square" lIns="0" tIns="0" rIns="0" bIns="0" rtlCol="0" anchor="t"/>
+          <a:lstStyle/>
+          <a:p>
+            <a:pPr algn="ctr" indent="0" marL="0">
+              <a:lnSpc>
+                <a:spcPts val="4752"/>
+              </a:lnSpc>
+              <a:buNone/>
+            </a:pPr>
+            <a:r>
+              <a:rPr lang="en-US" sz="4400" b="1" dirty="0">
+                <a:solidFill>
+                  <a:srgbClr val="262B30"/>
+                </a:solidFill>
+                <a:latin typeface="Noto Serif SC" pitchFamily="34" charset="0"/>
+                <a:ea typeface="Noto Serif SC" pitchFamily="34" charset="-122"/>
+                <a:cs typeface="Noto Serif SC" pitchFamily="34" charset="-120"/>
+              </a:rPr>
+              <a:t>厅</a:t>
+            </a:r>
+            <a:endParaRPr lang="en-US" sz="4400" dirty="0"/>
+          </a:p>
+        </p:txBody>
+      </p:sp>
+      <p:sp>
+        <p:nvSpPr>
+          <p:cNvPr id="15" name="Shape 13"/>
+          <p:cNvSpPr/>
+          <p:nvPr/>
+        </p:nvSpPr>
+        <p:spPr>
+          <a:xfrm>
+            <a:off x="2554784" y="3530650"/>
+            <a:ext cx="1532483" cy="0"/>
+          </a:xfrm>
+          <a:prstGeom prst="line">
+            <a:avLst/>
+          </a:prstGeom>
+          <a:noFill/>
+          <a:ln w="19050">
+            <a:solidFill>
+              <a:srgbClr val="6E7780"/>
+            </a:solidFill>
+            <a:prstDash val="solid"/>
+          </a:ln>
+        </p:spPr>
+      </p:sp>
+      <p:sp>
+        <p:nvSpPr>
+          <p:cNvPr id="16" name="Text 14"/>
+          <p:cNvSpPr/>
+          <p:nvPr/>
+        </p:nvSpPr>
+        <p:spPr>
+          <a:xfrm>
+            <a:off x="4309467" y="2390775"/>
+            <a:ext cx="1722983" cy="1282750"/>
+          </a:xfrm>
+          <a:prstGeom prst="roundRect">
+            <a:avLst>
+              <a:gd name="adj" fmla="val 4950"/>
+            </a:avLst>
+          </a:prstGeom>
+          <a:solidFill>
+            <a:srgbClr val="E6EAEB"/>
+          </a:solidFill>
+          <a:ln w="19050">
+            <a:solidFill>
+              <a:srgbClr val="D5DBDD"/>
+            </a:solidFill>
+          </a:ln>
+        </p:spPr>
+        <p:txBody>
+          <a:bodyPr wrap="square" rtlCol="0" anchor="ctr"/>
+          <a:lstStyle/>
+          <a:p>
+            <a:pPr indent="0" marL="0">
+              <a:buNone/>
+            </a:pPr>
+            <a:endParaRPr lang="en-US" dirty="0"/>
+          </a:p>
+        </p:txBody>
+      </p:sp>
+      <p:sp>
+        <p:nvSpPr>
+          <p:cNvPr id="17" name="Text 15"/>
+          <p:cNvSpPr/>
+          <p:nvPr/>
+        </p:nvSpPr>
+        <p:spPr>
+          <a:xfrm>
+            <a:off x="4389392" y="2549426"/>
+            <a:ext cx="1563133" cy="603498"/>
+          </a:xfrm>
+          <a:prstGeom prst="rect">
+            <a:avLst/>
+          </a:prstGeom>
+          <a:noFill/>
+          <a:ln/>
+        </p:spPr>
+        <p:txBody>
+          <a:bodyPr wrap="square" lIns="0" tIns="0" rIns="0" bIns="0" rtlCol="0" anchor="t"/>
+          <a:lstStyle/>
+          <a:p>
+            <a:pPr algn="ctr" indent="0" marL="0">
+              <a:lnSpc>
+                <a:spcPts val="4752"/>
+              </a:lnSpc>
+              <a:buNone/>
+            </a:pPr>
+            <a:r>
+              <a:rPr lang="en-US" sz="4400" b="1" dirty="0">
+                <a:solidFill>
+                  <a:srgbClr val="262B30"/>
+                </a:solidFill>
+                <a:latin typeface="Noto Serif SC" pitchFamily="34" charset="0"/>
+                <a:ea typeface="Noto Serif SC" pitchFamily="34" charset="-122"/>
+                <a:cs typeface="Noto Serif SC" pitchFamily="34" charset="-120"/>
+              </a:rPr>
+              <a:t>辆</a:t>
+            </a:r>
+            <a:endParaRPr lang="en-US" sz="4400" dirty="0"/>
+          </a:p>
+        </p:txBody>
+      </p:sp>
+      <p:sp>
+        <p:nvSpPr>
+          <p:cNvPr id="18" name="Shape 16"/>
+          <p:cNvSpPr/>
+          <p:nvPr/>
+        </p:nvSpPr>
+        <p:spPr>
+          <a:xfrm>
+            <a:off x="4404717" y="3530650"/>
+            <a:ext cx="1532483" cy="0"/>
+          </a:xfrm>
+          <a:prstGeom prst="line">
+            <a:avLst/>
+          </a:prstGeom>
+          <a:noFill/>
+          <a:ln w="19050">
+            <a:solidFill>
+              <a:srgbClr val="6E7780"/>
+            </a:solidFill>
+            <a:prstDash val="solid"/>
+          </a:ln>
+        </p:spPr>
+      </p:sp>
+      <p:sp>
+        <p:nvSpPr>
+          <p:cNvPr id="19" name="Text 17"/>
+          <p:cNvSpPr/>
+          <p:nvPr/>
+        </p:nvSpPr>
+        <p:spPr>
+          <a:xfrm>
+            <a:off x="6159401" y="2390775"/>
+            <a:ext cx="1722983" cy="1282750"/>
+          </a:xfrm>
+          <a:prstGeom prst="roundRect">
+            <a:avLst>
+              <a:gd name="adj" fmla="val 4950"/>
+            </a:avLst>
+          </a:prstGeom>
+          <a:solidFill>
+            <a:srgbClr val="E6EAEB"/>
+          </a:solidFill>
+          <a:ln w="19050">
+            <a:solidFill>
+              <a:srgbClr val="D5DBDD"/>
+            </a:solidFill>
+          </a:ln>
+        </p:spPr>
+        <p:txBody>
+          <a:bodyPr wrap="square" rtlCol="0" anchor="ctr"/>
+          <a:lstStyle/>
+          <a:p>
+            <a:pPr indent="0" marL="0">
+              <a:buNone/>
+            </a:pPr>
+            <a:endParaRPr lang="en-US" dirty="0"/>
+          </a:p>
+        </p:txBody>
+      </p:sp>
+      <p:sp>
+        <p:nvSpPr>
+          <p:cNvPr id="20" name="Text 18"/>
+          <p:cNvSpPr/>
+          <p:nvPr/>
+        </p:nvSpPr>
+        <p:spPr>
+          <a:xfrm>
+            <a:off x="6239326" y="2549426"/>
+            <a:ext cx="1563133" cy="603498"/>
+          </a:xfrm>
+          <a:prstGeom prst="rect">
+            <a:avLst/>
+          </a:prstGeom>
+          <a:noFill/>
+          <a:ln/>
+        </p:spPr>
+        <p:txBody>
+          <a:bodyPr wrap="square" lIns="0" tIns="0" rIns="0" bIns="0" rtlCol="0" anchor="t"/>
+          <a:lstStyle/>
+          <a:p>
+            <a:pPr algn="ctr" indent="0" marL="0">
+              <a:lnSpc>
+                <a:spcPts val="4752"/>
+              </a:lnSpc>
+              <a:buNone/>
+            </a:pPr>
+            <a:r>
+              <a:rPr lang="en-US" sz="4400" b="1" dirty="0">
+                <a:solidFill>
+                  <a:srgbClr val="262B30"/>
+                </a:solidFill>
+                <a:latin typeface="Noto Serif SC" pitchFamily="34" charset="0"/>
+                <a:ea typeface="Noto Serif SC" pitchFamily="34" charset="-122"/>
+                <a:cs typeface="Noto Serif SC" pitchFamily="34" charset="-120"/>
+              </a:rPr>
+              <a:t>冰</a:t>
+            </a:r>
+            <a:endParaRPr lang="en-US" sz="4400" dirty="0"/>
+          </a:p>
+        </p:txBody>
+      </p:sp>
+      <p:sp>
+        <p:nvSpPr>
+          <p:cNvPr id="21" name="Shape 19"/>
+          <p:cNvSpPr/>
+          <p:nvPr/>
+        </p:nvSpPr>
+        <p:spPr>
+          <a:xfrm>
+            <a:off x="6254651" y="3530650"/>
+            <a:ext cx="1532483" cy="0"/>
+          </a:xfrm>
+          <a:prstGeom prst="line">
+            <a:avLst/>
+          </a:prstGeom>
+          <a:noFill/>
+          <a:ln w="19050">
+            <a:solidFill>
+              <a:srgbClr val="6E7780"/>
+            </a:solidFill>
+            <a:prstDash val="solid"/>
+          </a:ln>
+        </p:spPr>
+      </p:sp>
+      <p:sp>
+        <p:nvSpPr>
+          <p:cNvPr id="22" name="Text 20"/>
+          <p:cNvSpPr/>
+          <p:nvPr/>
+        </p:nvSpPr>
+        <p:spPr>
+          <a:xfrm>
+            <a:off x="8009334" y="2390775"/>
+            <a:ext cx="1722983" cy="1282750"/>
+          </a:xfrm>
+          <a:prstGeom prst="roundRect">
+            <a:avLst>
+              <a:gd name="adj" fmla="val 4950"/>
+            </a:avLst>
+          </a:prstGeom>
+          <a:solidFill>
+            <a:srgbClr val="E6EAEB"/>
+          </a:solidFill>
+          <a:ln w="19050">
+            <a:solidFill>
+              <a:srgbClr val="D5DBDD"/>
+            </a:solidFill>
+          </a:ln>
+        </p:spPr>
+        <p:txBody>
+          <a:bodyPr wrap="square" rtlCol="0" anchor="ctr"/>
+          <a:lstStyle/>
+          <a:p>
+            <a:pPr indent="0" marL="0">
+              <a:buNone/>
+            </a:pPr>
+            <a:endParaRPr lang="en-US" dirty="0"/>
+          </a:p>
+        </p:txBody>
+      </p:sp>
+      <p:sp>
+        <p:nvSpPr>
+          <p:cNvPr id="23" name="Text 21"/>
+          <p:cNvSpPr/>
+          <p:nvPr/>
+        </p:nvSpPr>
+        <p:spPr>
+          <a:xfrm>
+            <a:off x="8089260" y="2549426"/>
+            <a:ext cx="1563133" cy="603498"/>
+          </a:xfrm>
+          <a:prstGeom prst="rect">
+            <a:avLst/>
+          </a:prstGeom>
+          <a:noFill/>
+          <a:ln/>
+        </p:spPr>
+        <p:txBody>
+          <a:bodyPr wrap="square" lIns="0" tIns="0" rIns="0" bIns="0" rtlCol="0" anchor="t"/>
+          <a:lstStyle/>
+          <a:p>
+            <a:pPr algn="ctr" indent="0" marL="0">
+              <a:lnSpc>
+                <a:spcPts val="4752"/>
+              </a:lnSpc>
+              <a:buNone/>
+            </a:pPr>
+            <a:r>
+              <a:rPr lang="en-US" sz="4400" b="1" dirty="0">
+                <a:solidFill>
+                  <a:srgbClr val="262B30"/>
+                </a:solidFill>
+                <a:latin typeface="Noto Serif SC" pitchFamily="34" charset="0"/>
+                <a:ea typeface="Noto Serif SC" pitchFamily="34" charset="-122"/>
+                <a:cs typeface="Noto Serif SC" pitchFamily="34" charset="-120"/>
+              </a:rPr>
+              <a:t>超</a:t>
+            </a:r>
+            <a:endParaRPr lang="en-US" sz="4400" dirty="0"/>
+          </a:p>
+        </p:txBody>
+      </p:sp>
+      <p:sp>
+        <p:nvSpPr>
+          <p:cNvPr id="24" name="Shape 22"/>
+          <p:cNvSpPr/>
+          <p:nvPr/>
+        </p:nvSpPr>
+        <p:spPr>
+          <a:xfrm>
+            <a:off x="8104584" y="3530650"/>
+            <a:ext cx="1532483" cy="0"/>
+          </a:xfrm>
+          <a:prstGeom prst="line">
+            <a:avLst/>
+          </a:prstGeom>
+          <a:noFill/>
+          <a:ln w="19050">
+            <a:solidFill>
+              <a:srgbClr val="6E7780"/>
+            </a:solidFill>
+            <a:prstDash val="solid"/>
+          </a:ln>
+        </p:spPr>
+      </p:sp>
+      <p:sp>
+        <p:nvSpPr>
+          <p:cNvPr id="25" name="Text 23"/>
+          <p:cNvSpPr/>
+          <p:nvPr/>
+        </p:nvSpPr>
+        <p:spPr>
+          <a:xfrm>
+            <a:off x="9859268" y="2390775"/>
+            <a:ext cx="1723132" cy="1282750"/>
+          </a:xfrm>
+          <a:prstGeom prst="roundRect">
+            <a:avLst>
+              <a:gd name="adj" fmla="val 4950"/>
+            </a:avLst>
+          </a:prstGeom>
+          <a:solidFill>
+            <a:srgbClr val="E6EAEB"/>
+          </a:solidFill>
+          <a:ln w="19050">
+            <a:solidFill>
+              <a:srgbClr val="D5DBDD"/>
+            </a:solidFill>
+          </a:ln>
+        </p:spPr>
+        <p:txBody>
+          <a:bodyPr wrap="square" rtlCol="0" anchor="ctr"/>
+          <a:lstStyle/>
+          <a:p>
+            <a:pPr indent="0" marL="0">
+              <a:buNone/>
+            </a:pPr>
+            <a:endParaRPr lang="en-US" dirty="0"/>
+          </a:p>
+        </p:txBody>
+      </p:sp>
+      <p:sp>
+        <p:nvSpPr>
+          <p:cNvPr id="26" name="Text 24"/>
+          <p:cNvSpPr/>
+          <p:nvPr/>
+        </p:nvSpPr>
+        <p:spPr>
+          <a:xfrm>
+            <a:off x="9939192" y="2549426"/>
+            <a:ext cx="1563285" cy="603498"/>
+          </a:xfrm>
+          <a:prstGeom prst="rect">
+            <a:avLst/>
+          </a:prstGeom>
+          <a:noFill/>
+          <a:ln/>
+        </p:spPr>
+        <p:txBody>
+          <a:bodyPr wrap="square" lIns="0" tIns="0" rIns="0" bIns="0" rtlCol="0" anchor="t"/>
+          <a:lstStyle/>
+          <a:p>
+            <a:pPr algn="ctr" indent="0" marL="0">
+              <a:lnSpc>
+                <a:spcPts val="4752"/>
+              </a:lnSpc>
+              <a:buNone/>
+            </a:pPr>
+            <a:r>
+              <a:rPr lang="en-US" sz="4400" b="1" dirty="0">
+                <a:solidFill>
+                  <a:srgbClr val="262B30"/>
+                </a:solidFill>
+                <a:latin typeface="Noto Serif SC" pitchFamily="34" charset="0"/>
+                <a:ea typeface="Noto Serif SC" pitchFamily="34" charset="-122"/>
+                <a:cs typeface="Noto Serif SC" pitchFamily="34" charset="-120"/>
+              </a:rPr>
+              <a:t>站</a:t>
+            </a:r>
+            <a:endParaRPr lang="en-US" sz="4400" dirty="0"/>
+          </a:p>
+        </p:txBody>
+      </p:sp>
+      <p:sp>
+        <p:nvSpPr>
+          <p:cNvPr id="27" name="Shape 25"/>
+          <p:cNvSpPr/>
+          <p:nvPr/>
+        </p:nvSpPr>
+        <p:spPr>
+          <a:xfrm>
+            <a:off x="9954518" y="3530650"/>
+            <a:ext cx="1532632" cy="0"/>
+          </a:xfrm>
+          <a:prstGeom prst="line">
+            <a:avLst/>
+          </a:prstGeom>
+          <a:noFill/>
+          <a:ln w="19050">
+            <a:solidFill>
+              <a:srgbClr val="6E7780"/>
+            </a:solidFill>
+            <a:prstDash val="solid"/>
+          </a:ln>
+        </p:spPr>
+      </p:sp>
+      <p:sp>
+        <p:nvSpPr>
+          <p:cNvPr id="28" name="Text 26"/>
+          <p:cNvSpPr/>
+          <p:nvPr/>
+        </p:nvSpPr>
+        <p:spPr>
+          <a:xfrm>
+            <a:off x="609600" y="3838575"/>
+            <a:ext cx="10972800" cy="993725"/>
+          </a:xfrm>
+          <a:prstGeom prst="roundRect">
+            <a:avLst>
+              <a:gd name="adj" fmla="val 6390"/>
+            </a:avLst>
+          </a:prstGeom>
+          <a:solidFill>
+            <a:srgbClr val="3D5A73">
+              <a:alpha val="11000"/>
+            </a:srgbClr>
+          </a:solidFill>
+          <a:ln w="19050">
+            <a:solidFill>
+              <a:srgbClr val="3D5A73"/>
+            </a:solidFill>
+          </a:ln>
+        </p:spPr>
+        <p:txBody>
+          <a:bodyPr wrap="square" rtlCol="0" anchor="ctr"/>
+          <a:lstStyle/>
+          <a:p>
+            <a:pPr indent="0" marL="0">
+              <a:buNone/>
+            </a:pPr>
+            <a:endParaRPr lang="en-US" dirty="0"/>
+          </a:p>
+        </p:txBody>
+      </p:sp>
+      <p:sp>
+        <p:nvSpPr>
+          <p:cNvPr id="29" name="Text 27"/>
+          <p:cNvSpPr/>
+          <p:nvPr/>
+        </p:nvSpPr>
+        <p:spPr>
+          <a:xfrm>
+            <a:off x="819150" y="3971925"/>
+            <a:ext cx="10764774" cy="200025"/>
+          </a:xfrm>
+          <a:prstGeom prst="rect">
+            <a:avLst/>
+          </a:prstGeom>
+          <a:noFill/>
+          <a:ln/>
+        </p:spPr>
+        <p:txBody>
+          <a:bodyPr wrap="square" lIns="0" tIns="0" rIns="0" bIns="0" rtlCol="0" anchor="t"/>
+          <a:lstStyle/>
+          <a:p>
+            <a:pPr algn="l" indent="0" marL="0">
+              <a:buNone/>
+            </a:pPr>
+            <a:r>
+              <a:rPr lang="en-US" sz="1100" b="1" dirty="0">
+                <a:solidFill>
+                  <a:srgbClr val="B05B3B"/>
+                </a:solidFill>
+                <a:latin typeface="Noto Sans" pitchFamily="34" charset="0"/>
+                <a:ea typeface="Noto Sans" pitchFamily="34" charset="-122"/>
+                <a:cs typeface="Noto Sans" pitchFamily="34" charset="-120"/>
+              </a:rPr>
+              <a:t>从这里选 · CHOOSE FROM</a:t>
+            </a:r>
+            <a:endParaRPr lang="en-US" sz="1100" dirty="0"/>
+          </a:p>
+        </p:txBody>
+      </p:sp>
+      <p:sp>
+        <p:nvSpPr>
+          <p:cNvPr id="30" name="Text 28"/>
+          <p:cNvSpPr/>
+          <p:nvPr/>
+        </p:nvSpPr>
+        <p:spPr>
+          <a:xfrm>
+            <a:off x="819150" y="4222700"/>
+            <a:ext cx="10764774" cy="476250"/>
+          </a:xfrm>
+          <a:prstGeom prst="rect">
+            <a:avLst/>
+          </a:prstGeom>
+          <a:noFill/>
+          <a:ln/>
+        </p:spPr>
+        <p:txBody>
+          <a:bodyPr wrap="square" lIns="0" tIns="0" rIns="0" bIns="0" rtlCol="0" anchor="t"/>
+          <a:lstStyle/>
+          <a:p>
+            <a:pPr algn="l" indent="0" marL="0">
+              <a:spcBef>
+                <a:spcPts val="400"/>
+              </a:spcBef>
+              <a:buNone/>
+            </a:pPr>
+            <a:r>
+              <a:rPr lang="en-US" sz="2700" b="1" dirty="0">
+                <a:solidFill>
+                  <a:srgbClr val="3D5A73"/>
+                </a:solidFill>
+                <a:latin typeface="Noto Serif SC" pitchFamily="34" charset="0"/>
+                <a:ea typeface="Noto Serif SC" pitchFamily="34" charset="-122"/>
+                <a:cs typeface="Noto Serif SC" pitchFamily="34" charset="-120"/>
+              </a:rPr>
+              <a:t>尸　厂　车　冫　走　立　口　火　氵</a:t>
+            </a:r>
+            <a:endParaRPr lang="en-US" sz="2700" dirty="0"/>
+          </a:p>
+        </p:txBody>
+      </p:sp>
+      <p:sp>
+        <p:nvSpPr>
+          <p:cNvPr id="31" name="Text 29"/>
+          <p:cNvSpPr/>
+          <p:nvPr/>
+        </p:nvSpPr>
+        <p:spPr>
+          <a:xfrm>
+            <a:off x="609600" y="4959251"/>
+            <a:ext cx="11192256" cy="228600"/>
+          </a:xfrm>
+          <a:prstGeom prst="rect">
+            <a:avLst/>
+          </a:prstGeom>
+          <a:noFill/>
+          <a:ln/>
+        </p:spPr>
+        <p:txBody>
+          <a:bodyPr wrap="square" lIns="0" tIns="0" rIns="0" bIns="0" rtlCol="0" anchor="t"/>
+          <a:lstStyle/>
+          <a:p>
+            <a:pPr algn="l" indent="0" marL="0">
+              <a:lnSpc>
+                <a:spcPts val="1800"/>
+              </a:lnSpc>
+              <a:spcBef>
+                <a:spcPts val="1000"/>
+              </a:spcBef>
+              <a:buNone/>
+            </a:pPr>
+            <a:r>
+              <a:rPr lang="en-US" sz="1200" dirty="0">
+                <a:solidFill>
+                  <a:srgbClr val="6E7780"/>
+                </a:solidFill>
+                <a:latin typeface="Noto Sans" pitchFamily="34" charset="0"/>
+                <a:ea typeface="Noto Sans" pitchFamily="34" charset="-122"/>
+                <a:cs typeface="Noto Sans" pitchFamily="34" charset="-120"/>
+              </a:rPr>
+              <a:t>写对最多的一组得分。</a:t>
+            </a:r>
+            <a:r>
+              <a:rPr lang="en-US" sz="1200" b="1" dirty="0">
+                <a:solidFill>
+                  <a:srgbClr val="6E7780"/>
+                </a:solidFill>
+                <a:latin typeface="Noto Sans" pitchFamily="34" charset="0"/>
+                <a:ea typeface="Noto Sans" pitchFamily="34" charset="-122"/>
+                <a:cs typeface="Noto Sans" pitchFamily="34" charset="-120"/>
+              </a:rPr>
+              <a:t>方格里有三个是多出来的。</a:t>
+            </a:r>
+            <a:r>
+              <a:rPr lang="en-US" sz="1200" dirty="0">
+                <a:solidFill>
+                  <a:srgbClr val="6E7780"/>
+                </a:solidFill>
+                <a:latin typeface="Noto Sans" pitchFamily="34" charset="0"/>
+                <a:ea typeface="Noto Sans" pitchFamily="34" charset="-122"/>
+                <a:cs typeface="Noto Sans" pitchFamily="34" charset="-120"/>
+              </a:rPr>
+              <a:t> 单元测验第三部分考的就是这六个字，而且</a:t>
+            </a:r>
+            <a:r>
+              <a:rPr lang="en-US" sz="1200" b="1" dirty="0">
+                <a:solidFill>
+                  <a:srgbClr val="6E7780"/>
+                </a:solidFill>
+                <a:latin typeface="Noto Sans" pitchFamily="34" charset="0"/>
+                <a:ea typeface="Noto Sans" pitchFamily="34" charset="-122"/>
+                <a:cs typeface="Noto Sans" pitchFamily="34" charset="-120"/>
+              </a:rPr>
+              <a:t>考试不给方格</a:t>
+            </a:r>
+            <a:r>
+              <a:rPr lang="en-US" sz="1200" dirty="0">
+                <a:solidFill>
+                  <a:srgbClr val="6E7780"/>
+                </a:solidFill>
+                <a:latin typeface="Noto Sans" pitchFamily="34" charset="0"/>
+                <a:ea typeface="Noto Sans" pitchFamily="34" charset="-122"/>
+                <a:cs typeface="Noto Sans" pitchFamily="34" charset="-120"/>
+              </a:rPr>
+              <a:t>——今天给，是因为这是第一次。</a:t>
+            </a:r>
+            <a:endParaRPr lang="en-US" sz="1200" dirty="0"/>
+          </a:p>
+        </p:txBody>
+      </p:sp>
+    </p:spTree>
+  </p:cSld>
+  <p:clrMapOvr>
+    <a:masterClrMapping/>
+  </p:clrMapOvr>
+</p:sld>
+</file>
+
+<file path=ppt/slides/slide21.xml><?xml version="1.0" encoding="utf-8"?>
+<p:sld xmlns:a="http://schemas.openxmlformats.org/drawingml/2006/main" xmlns:r="http://schemas.openxmlformats.org/officeDocument/2006/relationships" xmlns:p="http://schemas.openxmlformats.org/presentationml/2006/main">
+  <p:cSld name="Slide 21">
+    <p:bg>
+      <p:bgPr>
+        <a:solidFill>
+          <a:srgbClr val="F2F4F4"/>
+        </a:solidFill>
+      </p:bgPr>
+    </p:bg>
+    <p:spTree>
+      <p:nvGrpSpPr>
+        <p:cNvPr id="1" name=""/>
+        <p:cNvGrpSpPr/>
+        <p:nvPr/>
+      </p:nvGrpSpPr>
+      <p:grpSpPr>
+        <a:xfrm>
+          <a:off x="0" y="0"/>
+          <a:ext cx="0" cy="0"/>
+          <a:chOff x="0" y="0"/>
+          <a:chExt cx="0" cy="0"/>
+        </a:xfrm>
+      </p:grpSpPr>
+      <p:sp>
+        <p:nvSpPr>
+          <p:cNvPr id="2" name="Text 0"/>
+          <p:cNvSpPr/>
+          <p:nvPr/>
+        </p:nvSpPr>
+        <p:spPr>
+          <a:xfrm>
+            <a:off x="0" y="0"/>
+            <a:ext cx="12192000" cy="542925"/>
+          </a:xfrm>
+          <a:prstGeom prst="rect">
+            <a:avLst/>
+          </a:prstGeom>
+          <a:solidFill>
+            <a:srgbClr val="F2F4F4"/>
+          </a:solidFill>
+          <a:ln/>
+        </p:spPr>
+        <p:txBody>
+          <a:bodyPr wrap="square" rtlCol="0" anchor="ctr"/>
+          <a:lstStyle/>
+          <a:p>
+            <a:pPr indent="0" marL="0">
+              <a:buNone/>
+            </a:pPr>
+            <a:endParaRPr lang="en-US" dirty="0"/>
+          </a:p>
+        </p:txBody>
+      </p:sp>
+      <p:sp>
+        <p:nvSpPr>
+          <p:cNvPr id="3" name="Shape 1"/>
+          <p:cNvSpPr/>
+          <p:nvPr/>
+        </p:nvSpPr>
+        <p:spPr>
+          <a:xfrm>
+            <a:off x="0" y="538163"/>
+            <a:ext cx="12192000" cy="0"/>
+          </a:xfrm>
+          <a:prstGeom prst="line">
+            <a:avLst/>
+          </a:prstGeom>
+          <a:noFill/>
+          <a:ln w="9525">
+            <a:solidFill>
+              <a:srgbClr val="D5DBDD"/>
+            </a:solidFill>
+            <a:prstDash val="solid"/>
+          </a:ln>
+        </p:spPr>
+      </p:sp>
+      <p:sp>
+        <p:nvSpPr>
+          <p:cNvPr id="4" name="Text 2"/>
+          <p:cNvSpPr/>
+          <p:nvPr/>
+        </p:nvSpPr>
+        <p:spPr>
+          <a:xfrm>
+            <a:off x="507950" y="176213"/>
+            <a:ext cx="2644893" cy="180975"/>
+          </a:xfrm>
+          <a:prstGeom prst="rect">
+            <a:avLst/>
+          </a:prstGeom>
+          <a:noFill/>
+          <a:ln/>
+        </p:spPr>
+        <p:txBody>
+          <a:bodyPr wrap="square" lIns="0" tIns="0" rIns="0" bIns="0" rtlCol="0" anchor="t"/>
+          <a:lstStyle/>
+          <a:p>
+            <a:pPr algn="l" indent="0" marL="0">
+              <a:buNone/>
+            </a:pPr>
+            <a:r>
+              <a:rPr lang="en-US" sz="1000" b="1" dirty="0">
+                <a:solidFill>
+                  <a:srgbClr val="B05B3B"/>
+                </a:solidFill>
+                <a:latin typeface="Noto Sans" pitchFamily="34" charset="0"/>
+                <a:ea typeface="Noto Sans" pitchFamily="34" charset="-122"/>
+                <a:cs typeface="Noto Sans" pitchFamily="34" charset="-120"/>
+              </a:rPr>
+              <a:t>20–43 MIN · FLEXIBLE PRACTICE</a:t>
+            </a:r>
+            <a:endParaRPr lang="en-US" sz="1000" dirty="0"/>
+          </a:p>
+        </p:txBody>
+      </p:sp>
+      <p:sp>
+        <p:nvSpPr>
+          <p:cNvPr id="5" name="Text 3"/>
+          <p:cNvSpPr/>
+          <p:nvPr/>
+        </p:nvSpPr>
+        <p:spPr>
+          <a:xfrm>
+            <a:off x="3386435" y="166688"/>
+            <a:ext cx="1656796" cy="200025"/>
+          </a:xfrm>
+          <a:prstGeom prst="rect">
+            <a:avLst/>
+          </a:prstGeom>
+          <a:noFill/>
+          <a:ln/>
+        </p:spPr>
+        <p:txBody>
+          <a:bodyPr wrap="square" lIns="0" tIns="0" rIns="0" bIns="0" rtlCol="0" anchor="t"/>
+          <a:lstStyle/>
+          <a:p>
+            <a:pPr algn="l" indent="0" marL="0">
+              <a:buNone/>
+            </a:pPr>
+            <a:r>
+              <a:rPr lang="en-US" sz="1100" dirty="0">
+                <a:solidFill>
+                  <a:srgbClr val="4B545C"/>
+                </a:solidFill>
+                <a:latin typeface="Noto Sans" pitchFamily="34" charset="0"/>
+                <a:ea typeface="Noto Sans" pitchFamily="34" charset="-122"/>
+                <a:cs typeface="Noto Sans" pitchFamily="34" charset="-120"/>
+              </a:rPr>
+              <a:t>游戏 · 第三步 · 找独体字</a:t>
+            </a:r>
+            <a:endParaRPr lang="en-US" sz="1100" dirty="0"/>
+          </a:p>
+        </p:txBody>
+      </p:sp>
+      <p:sp>
+        <p:nvSpPr>
+          <p:cNvPr id="6" name="Text 4"/>
+          <p:cNvSpPr/>
+          <p:nvPr/>
+        </p:nvSpPr>
+        <p:spPr>
+          <a:xfrm>
+            <a:off x="11209288" y="176213"/>
+            <a:ext cx="484257" cy="180975"/>
+          </a:xfrm>
+          <a:prstGeom prst="rect">
+            <a:avLst/>
+          </a:prstGeom>
+          <a:noFill/>
+          <a:ln/>
+        </p:spPr>
+        <p:txBody>
+          <a:bodyPr wrap="square" lIns="0" tIns="0" rIns="0" bIns="0" rtlCol="0" anchor="t"/>
+          <a:lstStyle/>
+          <a:p>
+            <a:pPr algn="l" indent="0" marL="0">
+              <a:buNone/>
+            </a:pPr>
+            <a:r>
+              <a:rPr lang="en-US" sz="1000" dirty="0">
+                <a:solidFill>
+                  <a:srgbClr val="6E7780"/>
+                </a:solidFill>
+                <a:latin typeface="Noto Sans" pitchFamily="34" charset="0"/>
+                <a:ea typeface="Noto Sans" pitchFamily="34" charset="-122"/>
+                <a:cs typeface="Noto Sans" pitchFamily="34" charset="-120"/>
+              </a:rPr>
+              <a:t>20 / 21</a:t>
+            </a:r>
+            <a:endParaRPr lang="en-US" sz="1000" dirty="0"/>
+          </a:p>
+        </p:txBody>
+      </p:sp>
+      <p:sp>
+        <p:nvSpPr>
+          <p:cNvPr id="7" name="Text 5"/>
+          <p:cNvSpPr/>
+          <p:nvPr/>
+        </p:nvSpPr>
+        <p:spPr>
+          <a:xfrm>
+            <a:off x="507950" y="0"/>
+            <a:ext cx="11176099" cy="31700"/>
+          </a:xfrm>
+          <a:prstGeom prst="rect">
+            <a:avLst/>
+          </a:prstGeom>
+          <a:solidFill>
+            <a:srgbClr val="3D5A73"/>
+          </a:solidFill>
+          <a:ln/>
+        </p:spPr>
+        <p:txBody>
+          <a:bodyPr wrap="square" rtlCol="0" anchor="ctr"/>
+          <a:lstStyle/>
+          <a:p>
+            <a:pPr indent="0" marL="0">
+              <a:buNone/>
+            </a:pPr>
+            <a:endParaRPr lang="en-US" dirty="0"/>
+          </a:p>
+        </p:txBody>
+      </p:sp>
+      <p:sp>
+        <p:nvSpPr>
+          <p:cNvPr id="8" name="Text 6"/>
+          <p:cNvSpPr/>
+          <p:nvPr/>
+        </p:nvSpPr>
+        <p:spPr>
+          <a:xfrm>
+            <a:off x="609600" y="2274987"/>
+            <a:ext cx="11192256" cy="200025"/>
+          </a:xfrm>
+          <a:prstGeom prst="rect">
+            <a:avLst/>
+          </a:prstGeom>
+          <a:noFill/>
+          <a:ln/>
+        </p:spPr>
+        <p:txBody>
+          <a:bodyPr wrap="square" lIns="0" tIns="0" rIns="0" bIns="0" rtlCol="0" anchor="t"/>
+          <a:lstStyle/>
+          <a:p>
+            <a:pPr algn="l" indent="0" marL="0">
+              <a:buNone/>
+            </a:pPr>
+            <a:r>
+              <a:rPr lang="en-US" sz="1100" b="1" dirty="0">
+                <a:solidFill>
+                  <a:srgbClr val="B05B3B"/>
+                </a:solidFill>
+                <a:latin typeface="Noto Sans" pitchFamily="34" charset="0"/>
+                <a:ea typeface="Noto Sans" pitchFamily="34" charset="-122"/>
+                <a:cs typeface="Noto Sans" pitchFamily="34" charset="-120"/>
+              </a:rPr>
+              <a:t>游戏 · 第二轮 · 找里面的独体字 · 同一组，继续写</a:t>
+            </a:r>
+            <a:endParaRPr lang="en-US" sz="1100" dirty="0"/>
+          </a:p>
+        </p:txBody>
+      </p:sp>
+      <p:sp>
+        <p:nvSpPr>
+          <p:cNvPr id="9" name="Text 7"/>
+          <p:cNvSpPr/>
+          <p:nvPr/>
+        </p:nvSpPr>
+        <p:spPr>
+          <a:xfrm>
+            <a:off x="609600" y="2475012"/>
+            <a:ext cx="11192256" cy="342900"/>
+          </a:xfrm>
+          <a:prstGeom prst="rect">
+            <a:avLst/>
+          </a:prstGeom>
+          <a:noFill/>
+          <a:ln/>
+        </p:spPr>
+        <p:txBody>
+          <a:bodyPr wrap="square" lIns="0" tIns="0" rIns="0" bIns="0" rtlCol="0" anchor="t"/>
+          <a:lstStyle/>
+          <a:p>
+            <a:pPr algn="l" indent="0" marL="0">
+              <a:lnSpc>
+                <a:spcPts val="2700"/>
+              </a:lnSpc>
+              <a:spcAft>
+                <a:spcPts val="400"/>
+              </a:spcAft>
+              <a:buNone/>
+            </a:pPr>
+            <a:r>
+              <a:rPr lang="en-US" sz="1800" dirty="0">
+                <a:solidFill>
+                  <a:srgbClr val="4B545C"/>
+                </a:solidFill>
+                <a:latin typeface="Noto Sans" pitchFamily="34" charset="0"/>
+                <a:ea typeface="Noto Sans" pitchFamily="34" charset="-122"/>
+                <a:cs typeface="Noto Sans" pitchFamily="34" charset="-120"/>
+              </a:rPr>
+              <a:t>每个字里面藏着一个独体字，把它找出来，写下来。九十秒。</a:t>
+            </a:r>
+            <a:endParaRPr lang="en-US" sz="1800" dirty="0"/>
+          </a:p>
+        </p:txBody>
+      </p:sp>
+      <p:sp>
+        <p:nvSpPr>
+          <p:cNvPr id="10" name="Text 8"/>
+          <p:cNvSpPr/>
+          <p:nvPr/>
+        </p:nvSpPr>
+        <p:spPr>
+          <a:xfrm>
+            <a:off x="609600" y="2970163"/>
+            <a:ext cx="1722983" cy="1282750"/>
+          </a:xfrm>
+          <a:prstGeom prst="roundRect">
+            <a:avLst>
+              <a:gd name="adj" fmla="val 4950"/>
+            </a:avLst>
+          </a:prstGeom>
+          <a:solidFill>
+            <a:srgbClr val="E6EAEB"/>
+          </a:solidFill>
+          <a:ln w="19050">
+            <a:solidFill>
+              <a:srgbClr val="D5DBDD"/>
+            </a:solidFill>
+          </a:ln>
+        </p:spPr>
+        <p:txBody>
+          <a:bodyPr wrap="square" rtlCol="0" anchor="ctr"/>
+          <a:lstStyle/>
+          <a:p>
+            <a:pPr indent="0" marL="0">
+              <a:buNone/>
+            </a:pPr>
+            <a:endParaRPr lang="en-US" dirty="0"/>
+          </a:p>
+        </p:txBody>
+      </p:sp>
+      <p:sp>
+        <p:nvSpPr>
+          <p:cNvPr id="11" name="Text 9"/>
+          <p:cNvSpPr/>
+          <p:nvPr/>
+        </p:nvSpPr>
+        <p:spPr>
+          <a:xfrm>
+            <a:off x="689525" y="3128814"/>
+            <a:ext cx="1563133" cy="603498"/>
+          </a:xfrm>
+          <a:prstGeom prst="rect">
+            <a:avLst/>
+          </a:prstGeom>
+          <a:noFill/>
+          <a:ln/>
+        </p:spPr>
+        <p:txBody>
+          <a:bodyPr wrap="square" lIns="0" tIns="0" rIns="0" bIns="0" rtlCol="0" anchor="t"/>
+          <a:lstStyle/>
+          <a:p>
+            <a:pPr algn="ctr" indent="0" marL="0">
+              <a:lnSpc>
+                <a:spcPts val="4752"/>
+              </a:lnSpc>
+              <a:buNone/>
+            </a:pPr>
+            <a:r>
+              <a:rPr lang="en-US" sz="4400" b="1" dirty="0">
+                <a:solidFill>
+                  <a:srgbClr val="262B30"/>
+                </a:solidFill>
+                <a:latin typeface="Noto Serif SC" pitchFamily="34" charset="0"/>
+                <a:ea typeface="Noto Serif SC" pitchFamily="34" charset="-122"/>
+                <a:cs typeface="Noto Serif SC" pitchFamily="34" charset="-120"/>
+              </a:rPr>
+              <a:t>毕</a:t>
+            </a:r>
+            <a:endParaRPr lang="en-US" sz="4400" dirty="0"/>
+          </a:p>
+        </p:txBody>
+      </p:sp>
+      <p:sp>
+        <p:nvSpPr>
+          <p:cNvPr id="12" name="Shape 10"/>
+          <p:cNvSpPr/>
+          <p:nvPr/>
+        </p:nvSpPr>
+        <p:spPr>
+          <a:xfrm>
+            <a:off x="704850" y="4110037"/>
+            <a:ext cx="1532483" cy="0"/>
+          </a:xfrm>
+          <a:prstGeom prst="line">
+            <a:avLst/>
+          </a:prstGeom>
+          <a:noFill/>
+          <a:ln w="19050">
+            <a:solidFill>
+              <a:srgbClr val="6E7780"/>
+            </a:solidFill>
+            <a:prstDash val="solid"/>
+          </a:ln>
+        </p:spPr>
+      </p:sp>
+      <p:sp>
+        <p:nvSpPr>
+          <p:cNvPr id="13" name="Text 11"/>
+          <p:cNvSpPr/>
+          <p:nvPr/>
+        </p:nvSpPr>
+        <p:spPr>
+          <a:xfrm>
+            <a:off x="2459534" y="2970163"/>
+            <a:ext cx="1722983" cy="1282750"/>
+          </a:xfrm>
+          <a:prstGeom prst="roundRect">
+            <a:avLst>
+              <a:gd name="adj" fmla="val 4950"/>
+            </a:avLst>
+          </a:prstGeom>
+          <a:solidFill>
+            <a:srgbClr val="E6EAEB"/>
+          </a:solidFill>
+          <a:ln w="19050">
+            <a:solidFill>
+              <a:srgbClr val="D5DBDD"/>
+            </a:solidFill>
+          </a:ln>
+        </p:spPr>
+        <p:txBody>
+          <a:bodyPr wrap="square" rtlCol="0" anchor="ctr"/>
+          <a:lstStyle/>
+          <a:p>
+            <a:pPr indent="0" marL="0">
+              <a:buNone/>
+            </a:pPr>
+            <a:endParaRPr lang="en-US" dirty="0"/>
+          </a:p>
+        </p:txBody>
+      </p:sp>
+      <p:sp>
+        <p:nvSpPr>
+          <p:cNvPr id="14" name="Text 12"/>
+          <p:cNvSpPr/>
+          <p:nvPr/>
+        </p:nvSpPr>
+        <p:spPr>
+          <a:xfrm>
+            <a:off x="2539459" y="3128814"/>
+            <a:ext cx="1563133" cy="603498"/>
+          </a:xfrm>
+          <a:prstGeom prst="rect">
+            <a:avLst/>
+          </a:prstGeom>
+          <a:noFill/>
+          <a:ln/>
+        </p:spPr>
+        <p:txBody>
+          <a:bodyPr wrap="square" lIns="0" tIns="0" rIns="0" bIns="0" rtlCol="0" anchor="t"/>
+          <a:lstStyle/>
+          <a:p>
+            <a:pPr algn="ctr" indent="0" marL="0">
+              <a:lnSpc>
+                <a:spcPts val="4752"/>
+              </a:lnSpc>
+              <a:buNone/>
+            </a:pPr>
+            <a:r>
+              <a:rPr lang="en-US" sz="4400" b="1" dirty="0">
+                <a:solidFill>
+                  <a:srgbClr val="262B30"/>
+                </a:solidFill>
+                <a:latin typeface="Noto Serif SC" pitchFamily="34" charset="0"/>
+                <a:ea typeface="Noto Serif SC" pitchFamily="34" charset="-122"/>
+                <a:cs typeface="Noto Serif SC" pitchFamily="34" charset="-120"/>
+              </a:rPr>
+              <a:t>忘</a:t>
+            </a:r>
+            <a:endParaRPr lang="en-US" sz="4400" dirty="0"/>
+          </a:p>
+        </p:txBody>
+      </p:sp>
+      <p:sp>
+        <p:nvSpPr>
+          <p:cNvPr id="15" name="Shape 13"/>
+          <p:cNvSpPr/>
+          <p:nvPr/>
+        </p:nvSpPr>
+        <p:spPr>
+          <a:xfrm>
+            <a:off x="2554784" y="4110037"/>
+            <a:ext cx="1532483" cy="0"/>
+          </a:xfrm>
+          <a:prstGeom prst="line">
+            <a:avLst/>
+          </a:prstGeom>
+          <a:noFill/>
+          <a:ln w="19050">
+            <a:solidFill>
+              <a:srgbClr val="6E7780"/>
+            </a:solidFill>
+            <a:prstDash val="solid"/>
+          </a:ln>
+        </p:spPr>
+      </p:sp>
+      <p:sp>
+        <p:nvSpPr>
+          <p:cNvPr id="16" name="Text 14"/>
+          <p:cNvSpPr/>
+          <p:nvPr/>
+        </p:nvSpPr>
+        <p:spPr>
+          <a:xfrm>
+            <a:off x="4309467" y="2970163"/>
+            <a:ext cx="1722983" cy="1282750"/>
+          </a:xfrm>
+          <a:prstGeom prst="roundRect">
+            <a:avLst>
+              <a:gd name="adj" fmla="val 4950"/>
+            </a:avLst>
+          </a:prstGeom>
+          <a:solidFill>
+            <a:srgbClr val="E6EAEB"/>
+          </a:solidFill>
+          <a:ln w="19050">
+            <a:solidFill>
+              <a:srgbClr val="D5DBDD"/>
+            </a:solidFill>
+          </a:ln>
+        </p:spPr>
+        <p:txBody>
+          <a:bodyPr wrap="square" rtlCol="0" anchor="ctr"/>
+          <a:lstStyle/>
+          <a:p>
+            <a:pPr indent="0" marL="0">
+              <a:buNone/>
+            </a:pPr>
+            <a:endParaRPr lang="en-US" dirty="0"/>
+          </a:p>
+        </p:txBody>
+      </p:sp>
+      <p:sp>
+        <p:nvSpPr>
+          <p:cNvPr id="17" name="Text 15"/>
+          <p:cNvSpPr/>
+          <p:nvPr/>
+        </p:nvSpPr>
+        <p:spPr>
+          <a:xfrm>
+            <a:off x="4389392" y="3128814"/>
+            <a:ext cx="1563133" cy="603498"/>
+          </a:xfrm>
+          <a:prstGeom prst="rect">
+            <a:avLst/>
+          </a:prstGeom>
+          <a:noFill/>
+          <a:ln/>
+        </p:spPr>
+        <p:txBody>
+          <a:bodyPr wrap="square" lIns="0" tIns="0" rIns="0" bIns="0" rtlCol="0" anchor="t"/>
+          <a:lstStyle/>
+          <a:p>
+            <a:pPr algn="ctr" indent="0" marL="0">
+              <a:lnSpc>
+                <a:spcPts val="4752"/>
+              </a:lnSpc>
+              <a:buNone/>
+            </a:pPr>
+            <a:r>
+              <a:rPr lang="en-US" sz="4400" b="1" dirty="0">
+                <a:solidFill>
+                  <a:srgbClr val="262B30"/>
+                </a:solidFill>
+                <a:latin typeface="Noto Serif SC" pitchFamily="34" charset="0"/>
+                <a:ea typeface="Noto Serif SC" pitchFamily="34" charset="-122"/>
+                <a:cs typeface="Noto Serif SC" pitchFamily="34" charset="-120"/>
+              </a:rPr>
+              <a:t>返</a:t>
+            </a:r>
+            <a:endParaRPr lang="en-US" sz="4400" dirty="0"/>
+          </a:p>
+        </p:txBody>
+      </p:sp>
+      <p:sp>
+        <p:nvSpPr>
+          <p:cNvPr id="18" name="Shape 16"/>
+          <p:cNvSpPr/>
+          <p:nvPr/>
+        </p:nvSpPr>
+        <p:spPr>
+          <a:xfrm>
+            <a:off x="4404717" y="4110037"/>
+            <a:ext cx="1532483" cy="0"/>
+          </a:xfrm>
+          <a:prstGeom prst="line">
+            <a:avLst/>
+          </a:prstGeom>
+          <a:noFill/>
+          <a:ln w="19050">
+            <a:solidFill>
+              <a:srgbClr val="6E7780"/>
+            </a:solidFill>
+            <a:prstDash val="solid"/>
+          </a:ln>
+        </p:spPr>
+      </p:sp>
+      <p:sp>
+        <p:nvSpPr>
+          <p:cNvPr id="19" name="Text 17"/>
+          <p:cNvSpPr/>
+          <p:nvPr/>
+        </p:nvSpPr>
+        <p:spPr>
+          <a:xfrm>
+            <a:off x="6159401" y="2970163"/>
+            <a:ext cx="1722983" cy="1282750"/>
+          </a:xfrm>
+          <a:prstGeom prst="roundRect">
+            <a:avLst>
+              <a:gd name="adj" fmla="val 4950"/>
+            </a:avLst>
+          </a:prstGeom>
+          <a:solidFill>
+            <a:srgbClr val="E6EAEB"/>
+          </a:solidFill>
+          <a:ln w="19050">
+            <a:solidFill>
+              <a:srgbClr val="D5DBDD"/>
+            </a:solidFill>
+          </a:ln>
+        </p:spPr>
+        <p:txBody>
+          <a:bodyPr wrap="square" rtlCol="0" anchor="ctr"/>
+          <a:lstStyle/>
+          <a:p>
+            <a:pPr indent="0" marL="0">
+              <a:buNone/>
+            </a:pPr>
+            <a:endParaRPr lang="en-US" dirty="0"/>
+          </a:p>
+        </p:txBody>
+      </p:sp>
+      <p:sp>
+        <p:nvSpPr>
+          <p:cNvPr id="20" name="Text 18"/>
+          <p:cNvSpPr/>
+          <p:nvPr/>
+        </p:nvSpPr>
+        <p:spPr>
+          <a:xfrm>
+            <a:off x="6239326" y="3128814"/>
+            <a:ext cx="1563133" cy="603498"/>
+          </a:xfrm>
+          <a:prstGeom prst="rect">
+            <a:avLst/>
+          </a:prstGeom>
+          <a:noFill/>
+          <a:ln/>
+        </p:spPr>
+        <p:txBody>
+          <a:bodyPr wrap="square" lIns="0" tIns="0" rIns="0" bIns="0" rtlCol="0" anchor="t"/>
+          <a:lstStyle/>
+          <a:p>
+            <a:pPr algn="ctr" indent="0" marL="0">
+              <a:lnSpc>
+                <a:spcPts val="4752"/>
+              </a:lnSpc>
+              <a:buNone/>
+            </a:pPr>
+            <a:r>
+              <a:rPr lang="en-US" sz="4400" b="1" dirty="0">
+                <a:solidFill>
+                  <a:srgbClr val="262B30"/>
+                </a:solidFill>
+                <a:latin typeface="Noto Serif SC" pitchFamily="34" charset="0"/>
+                <a:ea typeface="Noto Serif SC" pitchFamily="34" charset="-122"/>
+                <a:cs typeface="Noto Serif SC" pitchFamily="34" charset="-120"/>
+              </a:rPr>
+              <a:t>蚂</a:t>
+            </a:r>
+            <a:endParaRPr lang="en-US" sz="4400" dirty="0"/>
+          </a:p>
+        </p:txBody>
+      </p:sp>
+      <p:sp>
+        <p:nvSpPr>
+          <p:cNvPr id="21" name="Shape 19"/>
+          <p:cNvSpPr/>
+          <p:nvPr/>
+        </p:nvSpPr>
+        <p:spPr>
+          <a:xfrm>
+            <a:off x="6254651" y="4110037"/>
+            <a:ext cx="1532483" cy="0"/>
+          </a:xfrm>
+          <a:prstGeom prst="line">
+            <a:avLst/>
+          </a:prstGeom>
+          <a:noFill/>
+          <a:ln w="19050">
+            <a:solidFill>
+              <a:srgbClr val="6E7780"/>
+            </a:solidFill>
+            <a:prstDash val="solid"/>
+          </a:ln>
+        </p:spPr>
+      </p:sp>
+      <p:sp>
+        <p:nvSpPr>
+          <p:cNvPr id="22" name="Text 20"/>
+          <p:cNvSpPr/>
+          <p:nvPr/>
+        </p:nvSpPr>
+        <p:spPr>
+          <a:xfrm>
+            <a:off x="8009334" y="2970163"/>
+            <a:ext cx="1722983" cy="1282750"/>
+          </a:xfrm>
+          <a:prstGeom prst="roundRect">
+            <a:avLst>
+              <a:gd name="adj" fmla="val 4950"/>
+            </a:avLst>
+          </a:prstGeom>
+          <a:solidFill>
+            <a:srgbClr val="E6EAEB"/>
+          </a:solidFill>
+          <a:ln w="19050">
+            <a:solidFill>
+              <a:srgbClr val="D5DBDD"/>
+            </a:solidFill>
+          </a:ln>
+        </p:spPr>
+        <p:txBody>
+          <a:bodyPr wrap="square" rtlCol="0" anchor="ctr"/>
+          <a:lstStyle/>
+          <a:p>
+            <a:pPr indent="0" marL="0">
+              <a:buNone/>
+            </a:pPr>
+            <a:endParaRPr lang="en-US" dirty="0"/>
+          </a:p>
+        </p:txBody>
+      </p:sp>
+      <p:sp>
+        <p:nvSpPr>
+          <p:cNvPr id="23" name="Text 21"/>
+          <p:cNvSpPr/>
+          <p:nvPr/>
+        </p:nvSpPr>
+        <p:spPr>
+          <a:xfrm>
+            <a:off x="8089260" y="3128814"/>
+            <a:ext cx="1563133" cy="603498"/>
+          </a:xfrm>
+          <a:prstGeom prst="rect">
+            <a:avLst/>
+          </a:prstGeom>
+          <a:noFill/>
+          <a:ln/>
+        </p:spPr>
+        <p:txBody>
+          <a:bodyPr wrap="square" lIns="0" tIns="0" rIns="0" bIns="0" rtlCol="0" anchor="t"/>
+          <a:lstStyle/>
+          <a:p>
+            <a:pPr algn="ctr" indent="0" marL="0">
+              <a:lnSpc>
+                <a:spcPts val="4752"/>
+              </a:lnSpc>
+              <a:buNone/>
+            </a:pPr>
+            <a:r>
+              <a:rPr lang="en-US" sz="4400" b="1" dirty="0">
+                <a:solidFill>
+                  <a:srgbClr val="262B30"/>
+                </a:solidFill>
+                <a:latin typeface="Noto Serif SC" pitchFamily="34" charset="0"/>
+                <a:ea typeface="Noto Serif SC" pitchFamily="34" charset="-122"/>
+                <a:cs typeface="Noto Serif SC" pitchFamily="34" charset="-120"/>
+              </a:rPr>
+              <a:t>仙</a:t>
+            </a:r>
+            <a:endParaRPr lang="en-US" sz="4400" dirty="0"/>
+          </a:p>
+        </p:txBody>
+      </p:sp>
+      <p:sp>
+        <p:nvSpPr>
+          <p:cNvPr id="24" name="Shape 22"/>
+          <p:cNvSpPr/>
+          <p:nvPr/>
+        </p:nvSpPr>
+        <p:spPr>
+          <a:xfrm>
+            <a:off x="8104584" y="4110037"/>
+            <a:ext cx="1532483" cy="0"/>
+          </a:xfrm>
+          <a:prstGeom prst="line">
+            <a:avLst/>
+          </a:prstGeom>
+          <a:noFill/>
+          <a:ln w="19050">
+            <a:solidFill>
+              <a:srgbClr val="6E7780"/>
+            </a:solidFill>
+            <a:prstDash val="solid"/>
+          </a:ln>
+        </p:spPr>
+      </p:sp>
+      <p:sp>
+        <p:nvSpPr>
+          <p:cNvPr id="25" name="Text 23"/>
+          <p:cNvSpPr/>
+          <p:nvPr/>
+        </p:nvSpPr>
+        <p:spPr>
+          <a:xfrm>
+            <a:off x="9859268" y="2970163"/>
+            <a:ext cx="1723132" cy="1282750"/>
+          </a:xfrm>
+          <a:prstGeom prst="roundRect">
+            <a:avLst>
+              <a:gd name="adj" fmla="val 4950"/>
+            </a:avLst>
+          </a:prstGeom>
+          <a:solidFill>
+            <a:srgbClr val="E6EAEB"/>
+          </a:solidFill>
+          <a:ln w="19050">
+            <a:solidFill>
+              <a:srgbClr val="D5DBDD"/>
+            </a:solidFill>
+          </a:ln>
+        </p:spPr>
+        <p:txBody>
+          <a:bodyPr wrap="square" rtlCol="0" anchor="ctr"/>
+          <a:lstStyle/>
+          <a:p>
+            <a:pPr indent="0" marL="0">
+              <a:buNone/>
+            </a:pPr>
+            <a:endParaRPr lang="en-US" dirty="0"/>
+          </a:p>
+        </p:txBody>
+      </p:sp>
+      <p:sp>
+        <p:nvSpPr>
+          <p:cNvPr id="26" name="Text 24"/>
+          <p:cNvSpPr/>
+          <p:nvPr/>
+        </p:nvSpPr>
+        <p:spPr>
+          <a:xfrm>
+            <a:off x="9939192" y="3128814"/>
+            <a:ext cx="1563285" cy="603498"/>
+          </a:xfrm>
+          <a:prstGeom prst="rect">
+            <a:avLst/>
+          </a:prstGeom>
+          <a:noFill/>
+          <a:ln/>
+        </p:spPr>
+        <p:txBody>
+          <a:bodyPr wrap="square" lIns="0" tIns="0" rIns="0" bIns="0" rtlCol="0" anchor="t"/>
+          <a:lstStyle/>
+          <a:p>
+            <a:pPr algn="ctr" indent="0" marL="0">
+              <a:lnSpc>
+                <a:spcPts val="4752"/>
+              </a:lnSpc>
+              <a:buNone/>
+            </a:pPr>
+            <a:r>
+              <a:rPr lang="en-US" sz="4400" b="1" dirty="0">
+                <a:solidFill>
+                  <a:srgbClr val="262B30"/>
+                </a:solidFill>
+                <a:latin typeface="Noto Serif SC" pitchFamily="34" charset="0"/>
+                <a:ea typeface="Noto Serif SC" pitchFamily="34" charset="-122"/>
+                <a:cs typeface="Noto Serif SC" pitchFamily="34" charset="-120"/>
+              </a:rPr>
+              <a:t>鸣</a:t>
+            </a:r>
+            <a:endParaRPr lang="en-US" sz="4400" dirty="0"/>
+          </a:p>
+        </p:txBody>
+      </p:sp>
+      <p:sp>
+        <p:nvSpPr>
+          <p:cNvPr id="27" name="Shape 25"/>
+          <p:cNvSpPr/>
+          <p:nvPr/>
+        </p:nvSpPr>
+        <p:spPr>
+          <a:xfrm>
+            <a:off x="9954518" y="4110037"/>
+            <a:ext cx="1532632" cy="0"/>
+          </a:xfrm>
+          <a:prstGeom prst="line">
+            <a:avLst/>
+          </a:prstGeom>
+          <a:noFill/>
+          <a:ln w="19050">
+            <a:solidFill>
+              <a:srgbClr val="6E7780"/>
+            </a:solidFill>
+            <a:prstDash val="solid"/>
+          </a:ln>
+        </p:spPr>
+      </p:sp>
+      <p:sp>
+        <p:nvSpPr>
+          <p:cNvPr id="28" name="Text 26"/>
+          <p:cNvSpPr/>
+          <p:nvPr/>
+        </p:nvSpPr>
+        <p:spPr>
+          <a:xfrm>
+            <a:off x="609600" y="4379863"/>
+            <a:ext cx="11192256" cy="228600"/>
+          </a:xfrm>
+          <a:prstGeom prst="rect">
+            <a:avLst/>
+          </a:prstGeom>
+          <a:noFill/>
+          <a:ln/>
+        </p:spPr>
+        <p:txBody>
+          <a:bodyPr wrap="square" lIns="0" tIns="0" rIns="0" bIns="0" rtlCol="0" anchor="t"/>
+          <a:lstStyle/>
+          <a:p>
+            <a:pPr algn="l" indent="0" marL="0">
+              <a:lnSpc>
+                <a:spcPts val="1800"/>
+              </a:lnSpc>
+              <a:spcBef>
+                <a:spcPts val="1000"/>
+              </a:spcBef>
+              <a:buNone/>
+            </a:pPr>
+            <a:r>
+              <a:rPr lang="en-US" sz="1200" dirty="0">
+                <a:solidFill>
+                  <a:srgbClr val="6E7780"/>
+                </a:solidFill>
+                <a:latin typeface="Noto Sans" pitchFamily="34" charset="0"/>
+                <a:ea typeface="Noto Sans" pitchFamily="34" charset="-122"/>
+                <a:cs typeface="Noto Sans" pitchFamily="34" charset="-120"/>
+              </a:rPr>
+              <a:t>这一轮</a:t>
+            </a:r>
+            <a:r>
+              <a:rPr lang="en-US" sz="1200" b="1" dirty="0">
+                <a:solidFill>
+                  <a:srgbClr val="6E7780"/>
+                </a:solidFill>
+                <a:latin typeface="Noto Sans" pitchFamily="34" charset="0"/>
+                <a:ea typeface="Noto Sans" pitchFamily="34" charset="-122"/>
+                <a:cs typeface="Noto Sans" pitchFamily="34" charset="-120"/>
+              </a:rPr>
+              <a:t>没有方格</a:t>
+            </a:r>
+            <a:r>
+              <a:rPr lang="en-US" sz="1200" dirty="0">
+                <a:solidFill>
+                  <a:srgbClr val="6E7780"/>
+                </a:solidFill>
+                <a:latin typeface="Noto Sans" pitchFamily="34" charset="0"/>
+                <a:ea typeface="Noto Sans" pitchFamily="34" charset="-122"/>
+                <a:cs typeface="Noto Sans" pitchFamily="34" charset="-120"/>
+              </a:rPr>
+              <a:t>，跟单元测验第四部分一样。上一页那八个字里，有的就在这六个字里面——先回头看一眼。两轮加起来分最高的一组赢。</a:t>
             </a:r>
             <a:endParaRPr lang="en-US" sz="1200" dirty="0"/>
           </a:p>
@@ -12145,8 +15404,8 @@
         </p:nvSpPr>
         <p:spPr>
           <a:xfrm>
-            <a:off x="11290995" y="176213"/>
-            <a:ext cx="400916" cy="180975"/>
+            <a:off x="11291888" y="176213"/>
+            <a:ext cx="400005" cy="180975"/>
           </a:xfrm>
           <a:prstGeom prst="rect">
             <a:avLst/>
@@ -12170,7 +15429,7 @@
                 <a:ea typeface="Noto Sans" pitchFamily="34" charset="-122"/>
                 <a:cs typeface="Noto Sans" pitchFamily="34" charset="-120"/>
               </a:rPr>
-              <a:t>3 / 19</a:t>
+              <a:t>3 / 21</a:t>
             </a:r>
             <a:endParaRPr lang="en-US" sz="1000" dirty="0"/>
           </a:p>
@@ -13025,8 +16284,8 @@
         </p:nvSpPr>
         <p:spPr>
           <a:xfrm>
-            <a:off x="11290399" y="176213"/>
-            <a:ext cx="401523" cy="180975"/>
+            <a:off x="11291292" y="176213"/>
+            <a:ext cx="400613" cy="180975"/>
           </a:xfrm>
           <a:prstGeom prst="rect">
             <a:avLst/>
@@ -13050,7 +16309,7 @@
                 <a:ea typeface="Noto Sans" pitchFamily="34" charset="-122"/>
                 <a:cs typeface="Noto Sans" pitchFamily="34" charset="-120"/>
               </a:rPr>
-              <a:t>4 / 19</a:t>
+              <a:t>4 / 21</a:t>
             </a:r>
             <a:endParaRPr lang="en-US" sz="1000" dirty="0"/>
           </a:p>
@@ -13902,8 +17161,8 @@
         </p:nvSpPr>
         <p:spPr>
           <a:xfrm>
-            <a:off x="11290548" y="176213"/>
-            <a:ext cx="401372" cy="180975"/>
+            <a:off x="11291441" y="176213"/>
+            <a:ext cx="400461" cy="180975"/>
           </a:xfrm>
           <a:prstGeom prst="rect">
             <a:avLst/>
@@ -13927,7 +17186,7 @@
                 <a:ea typeface="Noto Sans" pitchFamily="34" charset="-122"/>
                 <a:cs typeface="Noto Sans" pitchFamily="34" charset="-120"/>
               </a:rPr>
-              <a:t>5 / 19</a:t>
+              <a:t>5 / 21</a:t>
             </a:r>
             <a:endParaRPr lang="en-US" sz="1000" dirty="0"/>
           </a:p>
@@ -14004,7 +17263,7 @@
       </p:sp>
       <p:pic>
         <p:nvPicPr>
-          <p:cNvPr id="9" name="Image 0" descr="/var/folders/6c/210dcgxn4gz5sm71vld2cy1h0000gn/T/tmp.emPkXuZ1Lq/img/jiajudian.png">    </p:cNvPr>
+          <p:cNvPr id="9" name="Image 0" descr="/var/folders/6c/210dcgxn4gz5sm71vld2cy1h0000gn/T/tmp.owmCEDjpXl/img/jiajudian.png">    </p:cNvPr>
           <p:cNvPicPr>
             <a:picLocks noChangeAspect="1"/>
           </p:cNvPicPr>
@@ -14520,8 +17779,8 @@
         </p:nvSpPr>
         <p:spPr>
           <a:xfrm>
-            <a:off x="11289804" y="176213"/>
-            <a:ext cx="402131" cy="180975"/>
+            <a:off x="11290697" y="176213"/>
+            <a:ext cx="401220" cy="180975"/>
           </a:xfrm>
           <a:prstGeom prst="rect">
             <a:avLst/>
@@ -14545,7 +17804,7 @@
                 <a:ea typeface="Noto Sans" pitchFamily="34" charset="-122"/>
                 <a:cs typeface="Noto Sans" pitchFamily="34" charset="-120"/>
               </a:rPr>
-              <a:t>6 / 19</a:t>
+              <a:t>6 / 21</a:t>
             </a:r>
             <a:endParaRPr lang="en-US" sz="1000" dirty="0"/>
           </a:p>
@@ -14658,7 +17917,7 @@
       </p:sp>
       <p:pic>
         <p:nvPicPr>
-          <p:cNvPr id="10" name="Image 0" descr="/var/folders/6c/210dcgxn4gz5sm71vld2cy1h0000gn/T/tmp.emPkXuZ1Lq/img/shafa.png">    </p:cNvPr>
+          <p:cNvPr id="10" name="Image 0" descr="/var/folders/6c/210dcgxn4gz5sm71vld2cy1h0000gn/T/tmp.owmCEDjpXl/img/shafa.png">    </p:cNvPr>
           <p:cNvPicPr>
             <a:picLocks noChangeAspect="1"/>
           </p:cNvPicPr>
@@ -14757,7 +18016,7 @@
       </p:sp>
       <p:pic>
         <p:nvPicPr>
-          <p:cNvPr id="13" name="Image 1" descr="/var/folders/6c/210dcgxn4gz5sm71vld2cy1h0000gn/T/tmp.emPkXuZ1Lq/img/chaji.png">    </p:cNvPr>
+          <p:cNvPr id="13" name="Image 1" descr="/var/folders/6c/210dcgxn4gz5sm71vld2cy1h0000gn/T/tmp.owmCEDjpXl/img/chaji.png">    </p:cNvPr>
           <p:cNvPicPr>
             <a:picLocks noChangeAspect="1"/>
           </p:cNvPicPr>
@@ -14856,7 +18115,7 @@
       </p:sp>
       <p:pic>
         <p:nvPicPr>
-          <p:cNvPr id="16" name="Image 2" descr="/var/folders/6c/210dcgxn4gz5sm71vld2cy1h0000gn/T/tmp.emPkXuZ1Lq/img/dianshigui.png">    </p:cNvPr>
+          <p:cNvPr id="16" name="Image 2" descr="/var/folders/6c/210dcgxn4gz5sm71vld2cy1h0000gn/T/tmp.owmCEDjpXl/img/dianshigui.png">    </p:cNvPr>
           <p:cNvPicPr>
             <a:picLocks noChangeAspect="1"/>
           </p:cNvPicPr>
@@ -15030,7 +18289,7 @@
       </p:sp>
       <p:pic>
         <p:nvPicPr>
-          <p:cNvPr id="21" name="Image 3" descr="/var/folders/6c/210dcgxn4gz5sm71vld2cy1h0000gn/T/tmp.emPkXuZ1Lq/img/kongtiao.png">    </p:cNvPr>
+          <p:cNvPr id="21" name="Image 3" descr="/var/folders/6c/210dcgxn4gz5sm71vld2cy1h0000gn/T/tmp.owmCEDjpXl/img/kongtiao.png">    </p:cNvPr>
           <p:cNvPicPr>
             <a:picLocks noChangeAspect="1"/>
           </p:cNvPicPr>
@@ -15129,7 +18388,7 @@
       </p:sp>
       <p:pic>
         <p:nvPicPr>
-          <p:cNvPr id="24" name="Image 4" descr="/var/folders/6c/210dcgxn4gz5sm71vld2cy1h0000gn/T/tmp.emPkXuZ1Lq/img/xiyiji.png">    </p:cNvPr>
+          <p:cNvPr id="24" name="Image 4" descr="/var/folders/6c/210dcgxn4gz5sm71vld2cy1h0000gn/T/tmp.owmCEDjpXl/img/xiyiji.png">    </p:cNvPr>
           <p:cNvPicPr>
             <a:picLocks noChangeAspect="1"/>
           </p:cNvPicPr>
@@ -15228,7 +18487,7 @@
       </p:sp>
       <p:pic>
         <p:nvPicPr>
-          <p:cNvPr id="27" name="Image 5" descr="/var/folders/6c/210dcgxn4gz5sm71vld2cy1h0000gn/T/tmp.emPkXuZ1Lq/img/limian.png">    </p:cNvPr>
+          <p:cNvPr id="27" name="Image 5" descr="/var/folders/6c/210dcgxn4gz5sm71vld2cy1h0000gn/T/tmp.owmCEDjpXl/img/limian.png">    </p:cNvPr>
           <p:cNvPicPr>
             <a:picLocks noChangeAspect="1"/>
           </p:cNvPicPr>
@@ -15327,7 +18586,7 @@
       </p:sp>
       <p:pic>
         <p:nvPicPr>
-          <p:cNvPr id="30" name="Image 6" descr="/var/folders/6c/210dcgxn4gz5sm71vld2cy1h0000gn/T/tmp.emPkXuZ1Lq/img/bingxiang.png">    </p:cNvPr>
+          <p:cNvPr id="30" name="Image 6" descr="/var/folders/6c/210dcgxn4gz5sm71vld2cy1h0000gn/T/tmp.owmCEDjpXl/img/bingxiang.png">    </p:cNvPr>
           <p:cNvPicPr>
             <a:picLocks noChangeAspect="1"/>
           </p:cNvPicPr>
@@ -15426,7 +18685,7 @@
       </p:sp>
       <p:pic>
         <p:nvPicPr>
-          <p:cNvPr id="33" name="Image 7" descr="/var/folders/6c/210dcgxn4gz5sm71vld2cy1h0000gn/T/tmp.emPkXuZ1Lq/img/kaoxiang.png">    </p:cNvPr>
+          <p:cNvPr id="33" name="Image 7" descr="/var/folders/6c/210dcgxn4gz5sm71vld2cy1h0000gn/T/tmp.owmCEDjpXl/img/kaoxiang.png">    </p:cNvPr>
           <p:cNvPicPr>
             <a:picLocks noChangeAspect="1"/>
           </p:cNvPicPr>
@@ -15525,7 +18784,7 @@
       </p:sp>
       <p:pic>
         <p:nvPicPr>
-          <p:cNvPr id="36" name="Image 8" descr="/var/folders/6c/210dcgxn4gz5sm71vld2cy1h0000gn/T/tmp.emPkXuZ1Lq/img/dianlu.png">    </p:cNvPr>
+          <p:cNvPr id="36" name="Image 8" descr="/var/folders/6c/210dcgxn4gz5sm71vld2cy1h0000gn/T/tmp.owmCEDjpXl/img/dianlu.png">    </p:cNvPr>
           <p:cNvPicPr>
             <a:picLocks noChangeAspect="1"/>
           </p:cNvPicPr>
@@ -15624,7 +18883,7 @@
       </p:sp>
       <p:pic>
         <p:nvPicPr>
-          <p:cNvPr id="39" name="Image 9" descr="/var/folders/6c/210dcgxn4gz5sm71vld2cy1h0000gn/T/tmp.emPkXuZ1Lq/img/yizi.png">    </p:cNvPr>
+          <p:cNvPr id="39" name="Image 9" descr="/var/folders/6c/210dcgxn4gz5sm71vld2cy1h0000gn/T/tmp.owmCEDjpXl/img/yizi.png">    </p:cNvPr>
           <p:cNvPicPr>
             <a:picLocks noChangeAspect="1"/>
           </p:cNvPicPr>
@@ -15798,7 +19057,7 @@
       </p:sp>
       <p:pic>
         <p:nvPicPr>
-          <p:cNvPr id="44" name="Image 10" descr="/var/folders/6c/210dcgxn4gz5sm71vld2cy1h0000gn/T/tmp.emPkXuZ1Lq/img/shuzhuo.png">    </p:cNvPr>
+          <p:cNvPr id="44" name="Image 10" descr="/var/folders/6c/210dcgxn4gz5sm71vld2cy1h0000gn/T/tmp.owmCEDjpXl/img/shuzhuo.png">    </p:cNvPr>
           <p:cNvPicPr>
             <a:picLocks noChangeAspect="1"/>
           </p:cNvPicPr>
@@ -15897,7 +19156,7 @@
       </p:sp>
       <p:pic>
         <p:nvPicPr>
-          <p:cNvPr id="47" name="Image 11" descr="/var/folders/6c/210dcgxn4gz5sm71vld2cy1h0000gn/T/tmp.emPkXuZ1Lq/img/yigui.png">    </p:cNvPr>
+          <p:cNvPr id="47" name="Image 11" descr="/var/folders/6c/210dcgxn4gz5sm71vld2cy1h0000gn/T/tmp.owmCEDjpXl/img/yigui.png">    </p:cNvPr>
           <p:cNvPicPr>
             <a:picLocks noChangeAspect="1"/>
           </p:cNvPicPr>
@@ -15996,7 +19255,7 @@
       </p:sp>
       <p:pic>
         <p:nvPicPr>
-          <p:cNvPr id="50" name="Image 12" descr="/var/folders/6c/210dcgxn4gz5sm71vld2cy1h0000gn/T/tmp.emPkXuZ1Lq/img/shujia.png">    </p:cNvPr>
+          <p:cNvPr id="50" name="Image 12" descr="/var/folders/6c/210dcgxn4gz5sm71vld2cy1h0000gn/T/tmp.owmCEDjpXl/img/shujia.png">    </p:cNvPr>
           <p:cNvPicPr>
             <a:picLocks noChangeAspect="1"/>
           </p:cNvPicPr>
@@ -16195,8 +19454,8 @@
         </p:nvSpPr>
         <p:spPr>
           <a:xfrm>
-            <a:off x="507950" y="180975"/>
-            <a:ext cx="1264837" cy="171450"/>
+            <a:off x="507950" y="176213"/>
+            <a:ext cx="1371404" cy="180975"/>
           </a:xfrm>
           <a:prstGeom prst="rect">
             <a:avLst/>
@@ -16234,8 +19493,8 @@
         </p:nvSpPr>
         <p:spPr>
           <a:xfrm>
-            <a:off x="2033439" y="166688"/>
-            <a:ext cx="1571330" cy="200025"/>
+            <a:off x="2137916" y="166688"/>
+            <a:ext cx="1670307" cy="200025"/>
           </a:xfrm>
           <a:prstGeom prst="rect">
             <a:avLst/>
@@ -16273,8 +19532,8 @@
         </p:nvSpPr>
         <p:spPr>
           <a:xfrm>
-            <a:off x="11322397" y="180975"/>
-            <a:ext cx="368885" cy="171450"/>
+            <a:off x="11297245" y="176213"/>
+            <a:ext cx="394540" cy="180975"/>
           </a:xfrm>
           <a:prstGeom prst="rect">
             <a:avLst/>
@@ -16298,7 +19557,7 @@
                 <a:ea typeface="Noto Sans" pitchFamily="34" charset="-122"/>
                 <a:cs typeface="Noto Sans" pitchFamily="34" charset="-120"/>
               </a:rPr>
-              <a:t>7 / 19</a:t>
+              <a:t>7 / 21</a:t>
             </a:r>
             <a:endParaRPr lang="en-US" sz="1000" dirty="0"/>
           </a:p>
@@ -16342,7 +19601,7 @@
         </p:nvSpPr>
         <p:spPr>
           <a:xfrm>
-            <a:off x="609600" y="949821"/>
+            <a:off x="609600" y="954584"/>
             <a:ext cx="11192256" cy="200025"/>
           </a:xfrm>
           <a:prstGeom prst="rect">
@@ -16381,12 +19640,12 @@
         </p:nvSpPr>
         <p:spPr>
           <a:xfrm>
-            <a:off x="609600" y="1149846"/>
-            <a:ext cx="10972800" cy="857250"/>
+            <a:off x="609600" y="1154609"/>
+            <a:ext cx="10972800" cy="847725"/>
           </a:xfrm>
           <a:prstGeom prst="roundRect">
             <a:avLst>
-              <a:gd name="adj" fmla="val 13333"/>
+              <a:gd name="adj" fmla="val 13483"/>
             </a:avLst>
           </a:prstGeom>
           <a:solidFill>
@@ -16417,8 +19676,8 @@
         </p:nvSpPr>
         <p:spPr>
           <a:xfrm>
-            <a:off x="830199" y="1359396"/>
-            <a:ext cx="10531602" cy="438150"/>
+            <a:off x="830199" y="1364159"/>
+            <a:ext cx="10531602" cy="428625"/>
           </a:xfrm>
           <a:prstGeom prst="rect">
             <a:avLst/>
@@ -16456,7 +19715,7 @@
         </p:nvSpPr>
         <p:spPr>
           <a:xfrm>
-            <a:off x="609600" y="2134046"/>
+            <a:off x="609600" y="2129284"/>
             <a:ext cx="10972800" cy="1046411"/>
           </a:xfrm>
           <a:prstGeom prst="roundRect">
@@ -16492,7 +19751,7 @@
         </p:nvSpPr>
         <p:spPr>
           <a:xfrm>
-            <a:off x="822275" y="2295971"/>
+            <a:off x="822275" y="2291209"/>
             <a:ext cx="297841" cy="350490"/>
           </a:xfrm>
           <a:prstGeom prst="rect">
@@ -16534,7 +19793,7 @@
         </p:nvSpPr>
         <p:spPr>
           <a:xfrm>
-            <a:off x="1279327" y="2295971"/>
+            <a:off x="1279327" y="2291209"/>
             <a:ext cx="5712714" cy="400050"/>
           </a:xfrm>
           <a:prstGeom prst="rect">
@@ -16620,7 +19879,7 @@
         </p:nvSpPr>
         <p:spPr>
           <a:xfrm>
-            <a:off x="1279327" y="2734121"/>
+            <a:off x="1279327" y="2729359"/>
             <a:ext cx="5712714" cy="284411"/>
           </a:xfrm>
           <a:prstGeom prst="rect">
@@ -16665,7 +19924,7 @@
         </p:nvSpPr>
         <p:spPr>
           <a:xfrm>
-            <a:off x="609600" y="3332857"/>
+            <a:off x="609600" y="3328095"/>
             <a:ext cx="10972800" cy="1046411"/>
           </a:xfrm>
           <a:prstGeom prst="roundRect">
@@ -16701,7 +19960,7 @@
         </p:nvSpPr>
         <p:spPr>
           <a:xfrm>
-            <a:off x="822275" y="3494782"/>
+            <a:off x="822275" y="3490020"/>
             <a:ext cx="297841" cy="350490"/>
           </a:xfrm>
           <a:prstGeom prst="rect">
@@ -16743,7 +20002,7 @@
         </p:nvSpPr>
         <p:spPr>
           <a:xfrm>
-            <a:off x="1279327" y="3494782"/>
+            <a:off x="1279327" y="3490020"/>
             <a:ext cx="5712714" cy="400050"/>
           </a:xfrm>
           <a:prstGeom prst="rect">
@@ -16829,7 +20088,7 @@
         </p:nvSpPr>
         <p:spPr>
           <a:xfrm>
-            <a:off x="1279327" y="3932932"/>
+            <a:off x="1279327" y="3928170"/>
             <a:ext cx="5712714" cy="284411"/>
           </a:xfrm>
           <a:prstGeom prst="rect">
@@ -16874,7 +20133,7 @@
         </p:nvSpPr>
         <p:spPr>
           <a:xfrm>
-            <a:off x="609600" y="4531668"/>
+            <a:off x="609600" y="4526905"/>
             <a:ext cx="10972800" cy="1046411"/>
           </a:xfrm>
           <a:prstGeom prst="roundRect">
@@ -16910,7 +20169,7 @@
         </p:nvSpPr>
         <p:spPr>
           <a:xfrm>
-            <a:off x="822275" y="4693593"/>
+            <a:off x="822275" y="4688830"/>
             <a:ext cx="297841" cy="350490"/>
           </a:xfrm>
           <a:prstGeom prst="rect">
@@ -16952,8 +20211,8 @@
         </p:nvSpPr>
         <p:spPr>
           <a:xfrm>
-            <a:off x="1279327" y="4693593"/>
-            <a:ext cx="6080689" cy="400050"/>
+            <a:off x="1279327" y="4688830"/>
+            <a:ext cx="6413748" cy="400050"/>
           </a:xfrm>
           <a:prstGeom prst="rect">
             <a:avLst/>
@@ -17005,8 +20264,8 @@
         </p:nvSpPr>
         <p:spPr>
           <a:xfrm>
-            <a:off x="1279327" y="5131743"/>
-            <a:ext cx="6080689" cy="284411"/>
+            <a:off x="1279327" y="5126980"/>
+            <a:ext cx="6413748" cy="284411"/>
           </a:xfrm>
           <a:prstGeom prst="rect">
             <a:avLst/>
@@ -17050,7 +20309,7 @@
         </p:nvSpPr>
         <p:spPr>
           <a:xfrm>
-            <a:off x="609600" y="5705029"/>
+            <a:off x="609600" y="5700266"/>
             <a:ext cx="11192256" cy="228600"/>
           </a:xfrm>
           <a:prstGeom prst="rect">
@@ -17269,8 +20528,8 @@
         </p:nvSpPr>
         <p:spPr>
           <a:xfrm>
-            <a:off x="11290250" y="176213"/>
-            <a:ext cx="401675" cy="180975"/>
+            <a:off x="11291143" y="176213"/>
+            <a:ext cx="400764" cy="180975"/>
           </a:xfrm>
           <a:prstGeom prst="rect">
             <a:avLst/>
@@ -17294,7 +20553,7 @@
                 <a:ea typeface="Noto Sans" pitchFamily="34" charset="-122"/>
                 <a:cs typeface="Noto Sans" pitchFamily="34" charset="-120"/>
               </a:rPr>
-              <a:t>8 / 19</a:t>
+              <a:t>8 / 21</a:t>
             </a:r>
             <a:endParaRPr lang="en-US" sz="1000" dirty="0"/>
           </a:p>
@@ -17630,8 +20889,8 @@
         </p:nvSpPr>
         <p:spPr>
           <a:xfrm>
-            <a:off x="507950" y="176213"/>
-            <a:ext cx="1371404" cy="180975"/>
+            <a:off x="507950" y="180975"/>
+            <a:ext cx="1264837" cy="171450"/>
           </a:xfrm>
           <a:prstGeom prst="rect">
             <a:avLst/>
@@ -17669,8 +20928,8 @@
         </p:nvSpPr>
         <p:spPr>
           <a:xfrm>
-            <a:off x="2137916" y="166688"/>
-            <a:ext cx="1702945" cy="200025"/>
+            <a:off x="2033439" y="166688"/>
+            <a:ext cx="1568446" cy="200025"/>
           </a:xfrm>
           <a:prstGeom prst="rect">
             <a:avLst/>
@@ -17708,8 +20967,8 @@
         </p:nvSpPr>
         <p:spPr>
           <a:xfrm>
-            <a:off x="11289804" y="176213"/>
-            <a:ext cx="402131" cy="180975"/>
+            <a:off x="11322397" y="180975"/>
+            <a:ext cx="368885" cy="171450"/>
           </a:xfrm>
           <a:prstGeom prst="rect">
             <a:avLst/>
@@ -17733,7 +20992,7 @@
                 <a:ea typeface="Noto Sans" pitchFamily="34" charset="-122"/>
                 <a:cs typeface="Noto Sans" pitchFamily="34" charset="-120"/>
               </a:rPr>
-              <a:t>9 / 19</a:t>
+              <a:t>9 / 21</a:t>
             </a:r>
             <a:endParaRPr lang="en-US" sz="1000" dirty="0"/>
           </a:p>
